--- a/Uge39repe.pptx
+++ b/Uge39repe.pptx
@@ -5,7 +5,7 @@
     <p:sldMasterId id="2147483696" r:id="rId4"/>
   </p:sldMasterIdLst>
   <p:notesMasterIdLst>
-    <p:notesMasterId r:id="rId20"/>
+    <p:notesMasterId r:id="rId19"/>
   </p:notesMasterIdLst>
   <p:sldIdLst>
     <p:sldId id="256" r:id="rId5"/>
@@ -14,15 +14,14 @@
     <p:sldId id="315" r:id="rId8"/>
     <p:sldId id="266" r:id="rId9"/>
     <p:sldId id="268" r:id="rId10"/>
-    <p:sldId id="279" r:id="rId11"/>
-    <p:sldId id="316" r:id="rId12"/>
-    <p:sldId id="287" r:id="rId13"/>
-    <p:sldId id="286" r:id="rId14"/>
-    <p:sldId id="285" r:id="rId15"/>
-    <p:sldId id="270" r:id="rId16"/>
-    <p:sldId id="277" r:id="rId17"/>
-    <p:sldId id="335" r:id="rId18"/>
-    <p:sldId id="334" r:id="rId19"/>
+    <p:sldId id="316" r:id="rId11"/>
+    <p:sldId id="287" r:id="rId12"/>
+    <p:sldId id="286" r:id="rId13"/>
+    <p:sldId id="285" r:id="rId14"/>
+    <p:sldId id="270" r:id="rId15"/>
+    <p:sldId id="277" r:id="rId16"/>
+    <p:sldId id="335" r:id="rId17"/>
+    <p:sldId id="334" r:id="rId18"/>
   </p:sldIdLst>
   <p:sldSz cx="12192000" cy="6858000"/>
   <p:notesSz cx="6858000" cy="9144000"/>
@@ -247,7 +246,7 @@
           <a:p>
             <a:fld id="{BBF272A5-8E49-BE47-B6B4-135D452FC098}" type="datetimeFigureOut">
               <a:rPr lang="en-DK" smtClean="0"/>
-              <a:t>16/09/2026</a:t>
+              <a:t>18/09/2026</a:t>
             </a:fld>
             <a:endParaRPr lang="en-DK"/>
           </a:p>
@@ -678,7 +677,7 @@
           <a:p>
             <a:fld id="{9B3D9633-BFFF-EA42-89DE-7FA32332225C}" type="slidenum">
               <a:rPr lang="en-DK" smtClean="0"/>
-              <a:t>8</a:t>
+              <a:t>7</a:t>
             </a:fld>
             <a:endParaRPr lang="en-DK"/>
           </a:p>
@@ -769,7 +768,7 @@
           <a:p>
             <a:fld id="{9B3D9633-BFFF-EA42-89DE-7FA32332225C}" type="slidenum">
               <a:rPr lang="en-DK" smtClean="0"/>
-              <a:t>10</a:t>
+              <a:t>9</a:t>
             </a:fld>
             <a:endParaRPr lang="en-DK"/>
           </a:p>
@@ -857,7 +856,7 @@
           <a:p>
             <a:fld id="{9B3D9633-BFFF-EA42-89DE-7FA32332225C}" type="slidenum">
               <a:rPr lang="en-DK" smtClean="0"/>
-              <a:t>11</a:t>
+              <a:t>10</a:t>
             </a:fld>
             <a:endParaRPr lang="en-DK"/>
           </a:p>
@@ -1220,7 +1219,7 @@
           <a:p>
             <a:fld id="{9B3D9633-BFFF-EA42-89DE-7FA32332225C}" type="slidenum">
               <a:rPr lang="en-DK" smtClean="0"/>
-              <a:t>12</a:t>
+              <a:t>11</a:t>
             </a:fld>
             <a:endParaRPr lang="en-DK"/>
           </a:p>
@@ -1304,7 +1303,7 @@
           <a:p>
             <a:fld id="{80B61148-0DB5-AE45-9906-B50CBAE9DF76}" type="slidenum">
               <a:rPr lang="en-DK" smtClean="0"/>
-              <a:t>15</a:t>
+              <a:t>14</a:t>
             </a:fld>
             <a:endParaRPr lang="en-DK"/>
           </a:p>
@@ -1486,7 +1485,7 @@
           <a:p>
             <a:fld id="{1160EA64-D806-43AC-9DF2-F8C432F32B4C}" type="datetimeFigureOut">
               <a:rPr lang="en-US" dirty="0"/>
-              <a:t>9/16/26</a:t>
+              <a:t>9/18/26</a:t>
             </a:fld>
             <a:endParaRPr lang="en-US"/>
           </a:p>
@@ -1652,7 +1651,7 @@
           <a:p>
             <a:fld id="{E9F9C37B-1D36-470B-8223-D6C91242EC14}" type="datetimeFigureOut">
               <a:rPr lang="en-US" dirty="0"/>
-              <a:t>9/16/26</a:t>
+              <a:t>9/18/26</a:t>
             </a:fld>
             <a:endParaRPr lang="en-US"/>
           </a:p>
@@ -1827,7 +1826,7 @@
           <a:p>
             <a:fld id="{67C6F52A-A82B-47A2-A83A-8C4C91F2D59F}" type="datetimeFigureOut">
               <a:rPr lang="en-US" dirty="0"/>
-              <a:t>9/16/26</a:t>
+              <a:t>9/18/26</a:t>
             </a:fld>
             <a:endParaRPr lang="en-US"/>
           </a:p>
@@ -2051,7 +2050,7 @@
           <a:p>
             <a:fld id="{1D8BD707-D9CF-40AE-B4C6-C98DA3205C09}" type="datetimeFigureOut">
               <a:rPr lang="en-US"/>
-              <a:t>9/16/26</a:t>
+              <a:t>9/18/26</a:t>
             </a:fld>
             <a:endParaRPr lang="en-US"/>
           </a:p>
@@ -2211,7 +2210,7 @@
           <a:p>
             <a:fld id="{F070A7B3-6521-4DCA-87E5-044747A908C1}" type="datetimeFigureOut">
               <a:rPr lang="en-US" dirty="0"/>
-              <a:t>9/16/26</a:t>
+              <a:t>9/18/26</a:t>
             </a:fld>
             <a:endParaRPr lang="en-US"/>
           </a:p>
@@ -2475,7 +2474,7 @@
           <a:p>
             <a:fld id="{1160EA64-D806-43AC-9DF2-F8C432F32B4C}" type="datetimeFigureOut">
               <a:rPr lang="en-US" dirty="0"/>
-              <a:t>9/16/26</a:t>
+              <a:t>9/18/26</a:t>
             </a:fld>
             <a:endParaRPr lang="en-US"/>
           </a:p>
@@ -2703,7 +2702,7 @@
           <a:p>
             <a:fld id="{AB134690-1557-4C89-A502-4959FE7FAD70}" type="datetimeFigureOut">
               <a:rPr lang="en-US" dirty="0"/>
-              <a:t>9/16/26</a:t>
+              <a:t>9/18/26</a:t>
             </a:fld>
             <a:endParaRPr lang="en-US"/>
           </a:p>
@@ -3057,7 +3056,7 @@
           <a:p>
             <a:fld id="{4F7D4976-E339-4826-83B7-FBD03F55ECF8}" type="datetimeFigureOut">
               <a:rPr lang="en-US" dirty="0"/>
-              <a:t>9/16/26</a:t>
+              <a:t>9/18/26</a:t>
             </a:fld>
             <a:endParaRPr lang="en-US"/>
           </a:p>
@@ -3193,7 +3192,7 @@
           <a:p>
             <a:fld id="{E1037C31-9E7A-4F99-8774-A0E530DE1A42}" type="datetimeFigureOut">
               <a:rPr lang="en-US" dirty="0"/>
-              <a:t>9/16/26</a:t>
+              <a:t>9/18/26</a:t>
             </a:fld>
             <a:endParaRPr lang="en-US"/>
           </a:p>
@@ -3283,7 +3282,7 @@
           <a:p>
             <a:fld id="{C278504F-A551-4DE0-9316-4DCD1D8CC752}" type="datetimeFigureOut">
               <a:rPr lang="en-US" dirty="0"/>
-              <a:t>9/16/26</a:t>
+              <a:t>9/18/26</a:t>
             </a:fld>
             <a:endParaRPr lang="en-US"/>
           </a:p>
@@ -3635,7 +3634,7 @@
           <a:p>
             <a:fld id="{D1BE4249-C0D0-4B06-8692-E8BB871AF643}" type="datetimeFigureOut">
               <a:rPr lang="en-US" dirty="0"/>
-              <a:t>9/16/26</a:t>
+              <a:t>9/18/26</a:t>
             </a:fld>
             <a:endParaRPr lang="en-US"/>
           </a:p>
@@ -3987,7 +3986,7 @@
           <a:p>
             <a:fld id="{042B0DB6-F5C7-45FB-8CF3-31B45F9C2DAC}" type="datetimeFigureOut">
               <a:rPr lang="en-US" dirty="0"/>
-              <a:t>9/16/26</a:t>
+              <a:t>9/18/26</a:t>
             </a:fld>
             <a:endParaRPr lang="en-US"/>
           </a:p>
@@ -4224,7 +4223,7 @@
           <a:p>
             <a:fld id="{1160EA64-D806-43AC-9DF2-F8C432F32B4C}" type="datetimeFigureOut">
               <a:rPr lang="en-US" dirty="0"/>
-              <a:t>9/16/26</a:t>
+              <a:t>9/18/26</a:t>
             </a:fld>
             <a:endParaRPr lang="en-US"/>
           </a:p>
@@ -4765,7 +4764,7 @@
           <p:cNvPr id="2" name="Title 1">
             <a:extLst>
               <a:ext uri="{FF2B5EF4-FFF2-40B4-BE49-F238E27FC236}">
-                <a16:creationId xmlns:a16="http://schemas.microsoft.com/office/drawing/2014/main" id="{5A73AD80-8049-3778-C5C5-3E73AD5E0AE4}"/>
+                <a16:creationId xmlns:a16="http://schemas.microsoft.com/office/drawing/2014/main" id="{269B02B9-0513-CBBB-21B4-1B4A23F756F6}"/>
               </a:ext>
             </a:extLst>
           </p:cNvPr>
@@ -4789,8 +4788,8 @@
           <a:lstStyle/>
           <a:p>
             <a:r>
-              <a:rPr lang="en-DK"/>
-              <a:t>Meta tags</a:t>
+              <a:rPr lang="en-DK" dirty="0"/>
+              <a:t>Meta No index</a:t>
             </a:r>
           </a:p>
         </p:txBody>
@@ -4800,7 +4799,7 @@
           <p:cNvPr id="3" name="Text Placeholder 2">
             <a:extLst>
               <a:ext uri="{FF2B5EF4-FFF2-40B4-BE49-F238E27FC236}">
-                <a16:creationId xmlns:a16="http://schemas.microsoft.com/office/drawing/2014/main" id="{2DD04759-4F28-69F5-4496-15B725860287}"/>
+                <a16:creationId xmlns:a16="http://schemas.microsoft.com/office/drawing/2014/main" id="{76AA0898-BFE6-6818-761B-8CCC5395BE35}"/>
               </a:ext>
             </a:extLst>
           </p:cNvPr>
@@ -4814,7 +4813,7 @@
         <p:spPr>
           <a:xfrm>
             <a:off x="917575" y="1702288"/>
-            <a:ext cx="10300970" cy="400110"/>
+            <a:ext cx="10300970" cy="3200876"/>
           </a:xfrm>
         </p:spPr>
         <p:txBody>
@@ -4827,134 +4826,858 @@
               <a:buNone/>
             </a:pPr>
             <a:r>
-              <a:rPr lang="en-GB"/>
-              <a:t>&lt;meta charset="utf-8"&gt;</a:t>
-            </a:r>
-            <a:endParaRPr lang="en-US"/>
-          </a:p>
-        </p:txBody>
-      </p:sp>
-      <p:sp>
-        <p:nvSpPr>
-          <p:cNvPr id="5" name="TextBox 4">
-            <a:extLst>
-              <a:ext uri="{FF2B5EF4-FFF2-40B4-BE49-F238E27FC236}">
-                <a16:creationId xmlns:a16="http://schemas.microsoft.com/office/drawing/2014/main" id="{96699A2E-F991-3737-6C1D-18C5D4BB7E0B}"/>
-              </a:ext>
-            </a:extLst>
-          </p:cNvPr>
-          <p:cNvSpPr txBox="1"/>
-          <p:nvPr/>
-        </p:nvSpPr>
-        <p:spPr>
-          <a:xfrm>
-            <a:off x="3048000" y="2967335"/>
-            <a:ext cx="6096000" cy="3139321"/>
-          </a:xfrm>
-          <a:prstGeom prst="rect">
-            <a:avLst/>
-          </a:prstGeom>
-          <a:noFill/>
-        </p:spPr>
-        <p:txBody>
-          <a:bodyPr wrap="square" lIns="91440" tIns="45720" rIns="91440" bIns="45720" anchor="t">
-            <a:spAutoFit/>
-          </a:bodyPr>
-          <a:lstStyle/>
-          <a:p>
-            <a:pPr>
-              <a:buFont typeface="Arial" panose="020B0604020202020204" pitchFamily="34" charset="0"/>
-              <a:buChar char="•"/>
+              <a:rPr lang="en-DK" dirty="0"/>
+              <a:t> &lt;meta name="robots" content="noindex"&gt;</a:t>
+            </a:r>
+            <a:endParaRPr lang="en-GB" dirty="0"/>
+          </a:p>
+          <a:p>
+            <a:endParaRPr lang="en-GB" dirty="0"/>
+          </a:p>
+          <a:p>
+            <a:pPr marL="0" indent="0">
+              <a:buNone/>
             </a:pPr>
             <a:r>
-              <a:rPr lang="en-GB" dirty="0"/>
-              <a:t>It ensures that text, including special characters (like accents, emojis, or non-Latin scripts), displays correctly in the browser.</a:t>
-            </a:r>
-          </a:p>
-          <a:p>
-            <a:pPr>
-              <a:buFont typeface="Arial" panose="020B0604020202020204" pitchFamily="34" charset="0"/>
-              <a:buChar char="•"/>
-            </a:pPr>
+              <a:rPr lang="en-DK" dirty="0"/>
+              <a:t>tell search engines not to include a page in their search results.</a:t>
+            </a:r>
             <a:endParaRPr lang="en-GB" dirty="0"/>
           </a:p>
           <a:p>
-            <a:pPr>
-              <a:buFont typeface="Arial" panose="020B0604020202020204" pitchFamily="34" charset="0"/>
-              <a:buChar char="•"/>
-            </a:pPr>
-            <a:r>
-              <a:rPr lang="en-GB" dirty="0"/>
-              <a:t>Without it, browsers might misinterpret characters  (e.g., </a:t>
-            </a:r>
-            <a:r>
-              <a:rPr lang="en-GB" dirty="0" err="1"/>
-              <a:t>Å</a:t>
-            </a:r>
-            <a:r>
-              <a:rPr lang="en-GB" dirty="0"/>
-              <a:t>. © ).</a:t>
-            </a:r>
-          </a:p>
-          <a:p>
-            <a:pPr>
-              <a:buFont typeface="Arial" panose="020B0604020202020204" pitchFamily="34" charset="0"/>
-              <a:buChar char="•"/>
-            </a:pPr>
-            <a:endParaRPr lang="en-GB" dirty="0"/>
-          </a:p>
-          <a:p>
-            <a:pPr>
-              <a:buFont typeface="Arial" panose="020B0604020202020204" pitchFamily="34" charset="0"/>
-              <a:buChar char="•"/>
-            </a:pPr>
-            <a:endParaRPr lang="en-GB" dirty="0"/>
-          </a:p>
-          <a:p>
-            <a:pPr>
-              <a:buFont typeface="Arial" panose="020B0604020202020204" pitchFamily="34" charset="0"/>
-              <a:buChar char="•"/>
-            </a:pPr>
-            <a:endParaRPr lang="en-GB" dirty="0"/>
-          </a:p>
-          <a:p>
-            <a:pPr>
-              <a:buFont typeface="Arial" panose="020B0604020202020204" pitchFamily="34" charset="0"/>
-              <a:buChar char="•"/>
-            </a:pPr>
-            <a:endParaRPr lang="en-GB" dirty="0"/>
-          </a:p>
-          <a:p>
-            <a:pPr>
-              <a:buFont typeface="Arial" panose="020B0604020202020204" pitchFamily="34" charset="0"/>
-              <a:buChar char="•"/>
-            </a:pPr>
-            <a:endParaRPr lang="en-GB" dirty="0"/>
-          </a:p>
-          <a:p>
-            <a:endParaRPr lang="en-GB" dirty="0"/>
+            <a:endParaRPr lang="en-DK" dirty="0"/>
           </a:p>
         </p:txBody>
       </p:sp>
     </p:spTree>
     <p:extLst>
       <p:ext uri="{BB962C8B-B14F-4D97-AF65-F5344CB8AC3E}">
-        <p14:creationId xmlns:p14="http://schemas.microsoft.com/office/powerpoint/2010/main" val="3817107581"/>
+        <p14:creationId xmlns:p14="http://schemas.microsoft.com/office/powerpoint/2010/main" val="2655987921"/>
       </p:ext>
     </p:extLst>
   </p:cSld>
   <p:clrMapOvr>
     <a:masterClrMapping/>
   </p:clrMapOvr>
-  <p:extLst>
-    <p:ext uri="{6950BFC3-D8DA-4A85-94F7-54DA5524770B}">
-      <p188:commentRel xmlns:p188="http://schemas.microsoft.com/office/powerpoint/2018/8/main" r:id="rId3"/>
-    </p:ext>
-  </p:extLst>
 </p:sld>
 </file>
 
 <file path=ppt/slides/slide11.xml><?xml version="1.0" encoding="utf-8"?>
+<p:sld xmlns:a="http://schemas.openxmlformats.org/drawingml/2006/main" xmlns:r="http://schemas.openxmlformats.org/officeDocument/2006/relationships" xmlns:p="http://schemas.openxmlformats.org/presentationml/2006/main" showMasterSp="0">
+  <p:cSld>
+    <p:spTree>
+      <p:nvGrpSpPr>
+        <p:cNvPr id="1" name=""/>
+        <p:cNvGrpSpPr/>
+        <p:nvPr/>
+      </p:nvGrpSpPr>
+      <p:grpSpPr>
+        <a:xfrm>
+          <a:off x="0" y="0"/>
+          <a:ext cx="0" cy="0"/>
+          <a:chOff x="0" y="0"/>
+          <a:chExt cx="0" cy="0"/>
+        </a:xfrm>
+      </p:grpSpPr>
+      <p:sp>
+        <p:nvSpPr>
+          <p:cNvPr id="2" name="object 2"/>
+          <p:cNvSpPr txBox="1">
+            <a:spLocks noGrp="1"/>
+          </p:cNvSpPr>
+          <p:nvPr>
+            <p:ph type="title"/>
+          </p:nvPr>
+        </p:nvSpPr>
+        <p:spPr>
+          <a:xfrm>
+            <a:off x="917575" y="736023"/>
+            <a:ext cx="1640839" cy="447558"/>
+          </a:xfrm>
+          <a:prstGeom prst="rect">
+            <a:avLst/>
+          </a:prstGeom>
+        </p:spPr>
+        <p:txBody>
+          <a:bodyPr vert="horz" wrap="square" lIns="0" tIns="16510" rIns="0" bIns="0" rtlCol="0">
+            <a:spAutoFit/>
+          </a:bodyPr>
+          <a:lstStyle/>
+          <a:p>
+            <a:pPr marL="12700">
+              <a:lnSpc>
+                <a:spcPct val="100000"/>
+              </a:lnSpc>
+              <a:spcBef>
+                <a:spcPts val="130"/>
+              </a:spcBef>
+            </a:pPr>
+            <a:r>
+              <a:rPr spc="-80"/>
+              <a:t>Alt</a:t>
+            </a:r>
+            <a:r>
+              <a:rPr spc="-215"/>
+              <a:t> </a:t>
+            </a:r>
+            <a:r>
+              <a:rPr lang="da-DK" spc="-215"/>
+              <a:t> </a:t>
+            </a:r>
+            <a:r>
+              <a:rPr spc="-70"/>
+              <a:t>text</a:t>
+            </a:r>
+          </a:p>
+        </p:txBody>
+      </p:sp>
+      <p:sp>
+        <p:nvSpPr>
+          <p:cNvPr id="3" name="object 3"/>
+          <p:cNvSpPr txBox="1"/>
+          <p:nvPr/>
+        </p:nvSpPr>
+        <p:spPr>
+          <a:xfrm>
+            <a:off x="917575" y="1794255"/>
+            <a:ext cx="10293350" cy="2111475"/>
+          </a:xfrm>
+          <a:prstGeom prst="rect">
+            <a:avLst/>
+          </a:prstGeom>
+        </p:spPr>
+        <p:txBody>
+          <a:bodyPr vert="horz" wrap="square" lIns="0" tIns="48895" rIns="0" bIns="0" rtlCol="0">
+            <a:spAutoFit/>
+          </a:bodyPr>
+          <a:lstStyle/>
+          <a:p>
+            <a:pPr marL="241300" marR="415290" indent="-229235">
+              <a:lnSpc>
+                <a:spcPct val="92200"/>
+              </a:lnSpc>
+              <a:spcBef>
+                <a:spcPts val="385"/>
+              </a:spcBef>
+              <a:buChar char="•"/>
+              <a:tabLst>
+                <a:tab pos="241300" algn="l"/>
+              </a:tabLst>
+            </a:pPr>
+            <a:r>
+              <a:rPr sz="2750" dirty="0">
+                <a:latin typeface="Arial"/>
+                <a:cs typeface="Arial"/>
+              </a:rPr>
+              <a:t>Alt</a:t>
+            </a:r>
+            <a:r>
+              <a:rPr sz="2750" spc="-140" dirty="0">
+                <a:latin typeface="Arial"/>
+                <a:cs typeface="Arial"/>
+              </a:rPr>
+              <a:t> </a:t>
+            </a:r>
+            <a:r>
+              <a:rPr sz="2750" spc="-10" dirty="0">
+                <a:latin typeface="Arial"/>
+                <a:cs typeface="Arial"/>
+              </a:rPr>
+              <a:t>text</a:t>
+            </a:r>
+            <a:r>
+              <a:rPr sz="2750" spc="-135" dirty="0">
+                <a:latin typeface="Arial"/>
+                <a:cs typeface="Arial"/>
+              </a:rPr>
+              <a:t> </a:t>
+            </a:r>
+            <a:r>
+              <a:rPr sz="2750" spc="-50" dirty="0">
+                <a:latin typeface="Arial"/>
+                <a:cs typeface="Arial"/>
+              </a:rPr>
+              <a:t>(alternative</a:t>
+            </a:r>
+            <a:r>
+              <a:rPr sz="2750" spc="-125" dirty="0">
+                <a:latin typeface="Arial"/>
+                <a:cs typeface="Arial"/>
+              </a:rPr>
+              <a:t> </a:t>
+            </a:r>
+            <a:r>
+              <a:rPr sz="2750" spc="-10" dirty="0">
+                <a:latin typeface="Arial"/>
+                <a:cs typeface="Arial"/>
+              </a:rPr>
+              <a:t>text)</a:t>
+            </a:r>
+            <a:r>
+              <a:rPr sz="2750" spc="-114" dirty="0">
+                <a:latin typeface="Arial"/>
+                <a:cs typeface="Arial"/>
+              </a:rPr>
+              <a:t> </a:t>
+            </a:r>
+            <a:r>
+              <a:rPr sz="2750" spc="-125" dirty="0">
+                <a:latin typeface="Arial"/>
+                <a:cs typeface="Arial"/>
+              </a:rPr>
+              <a:t>is</a:t>
+            </a:r>
+            <a:r>
+              <a:rPr sz="2750" spc="-130" dirty="0">
+                <a:latin typeface="Arial"/>
+                <a:cs typeface="Arial"/>
+              </a:rPr>
+              <a:t> </a:t>
+            </a:r>
+            <a:r>
+              <a:rPr sz="2750" spc="-204" dirty="0">
+                <a:latin typeface="Arial"/>
+                <a:cs typeface="Arial"/>
+              </a:rPr>
+              <a:t>a</a:t>
+            </a:r>
+            <a:r>
+              <a:rPr sz="2750" spc="-150" dirty="0">
+                <a:latin typeface="Arial"/>
+                <a:cs typeface="Arial"/>
+              </a:rPr>
+              <a:t> </a:t>
+            </a:r>
+            <a:r>
+              <a:rPr sz="2750" spc="-40" dirty="0">
+                <a:latin typeface="Arial"/>
+                <a:cs typeface="Arial"/>
+              </a:rPr>
+              <a:t>short,</a:t>
+            </a:r>
+            <a:r>
+              <a:rPr sz="2750" spc="-185" dirty="0">
+                <a:latin typeface="Arial"/>
+                <a:cs typeface="Arial"/>
+              </a:rPr>
+              <a:t> </a:t>
+            </a:r>
+            <a:r>
+              <a:rPr sz="2750" spc="-75" dirty="0">
+                <a:latin typeface="Arial"/>
+                <a:cs typeface="Arial"/>
+              </a:rPr>
+              <a:t>descriptive</a:t>
+            </a:r>
+            <a:r>
+              <a:rPr sz="2750" spc="-125" dirty="0">
+                <a:latin typeface="Arial"/>
+                <a:cs typeface="Arial"/>
+              </a:rPr>
+              <a:t> </a:t>
+            </a:r>
+            <a:r>
+              <a:rPr sz="2750" dirty="0">
+                <a:latin typeface="Arial"/>
+                <a:cs typeface="Arial"/>
+              </a:rPr>
+              <a:t>text</a:t>
+            </a:r>
+            <a:r>
+              <a:rPr sz="2750" spc="-130" dirty="0">
+                <a:latin typeface="Arial"/>
+                <a:cs typeface="Arial"/>
+              </a:rPr>
+              <a:t> </a:t>
+            </a:r>
+            <a:r>
+              <a:rPr sz="2750" spc="-135" dirty="0">
+                <a:latin typeface="Arial"/>
+                <a:cs typeface="Arial"/>
+              </a:rPr>
+              <a:t>associated</a:t>
+            </a:r>
+            <a:r>
+              <a:rPr sz="2750" spc="-130" dirty="0">
+                <a:latin typeface="Arial"/>
+                <a:cs typeface="Arial"/>
+              </a:rPr>
+              <a:t> </a:t>
+            </a:r>
+            <a:r>
+              <a:rPr sz="2750" spc="-20" dirty="0">
+                <a:latin typeface="Arial"/>
+                <a:cs typeface="Arial"/>
+              </a:rPr>
+              <a:t>with </a:t>
+            </a:r>
+            <a:r>
+              <a:rPr sz="2750" spc="-160" dirty="0">
+                <a:latin typeface="Arial"/>
+                <a:cs typeface="Arial"/>
+              </a:rPr>
+              <a:t>images</a:t>
+            </a:r>
+            <a:r>
+              <a:rPr sz="2750" spc="-125" dirty="0">
+                <a:latin typeface="Arial"/>
+                <a:cs typeface="Arial"/>
+              </a:rPr>
+              <a:t> </a:t>
+            </a:r>
+            <a:r>
+              <a:rPr sz="2750" dirty="0">
+                <a:latin typeface="Arial"/>
+                <a:cs typeface="Arial"/>
+              </a:rPr>
+              <a:t>in</a:t>
+            </a:r>
+            <a:r>
+              <a:rPr sz="2750" spc="-125" dirty="0">
+                <a:latin typeface="Arial"/>
+                <a:cs typeface="Arial"/>
+              </a:rPr>
+              <a:t> </a:t>
+            </a:r>
+            <a:r>
+              <a:rPr sz="2750" spc="-195" dirty="0">
+                <a:latin typeface="Arial"/>
+                <a:cs typeface="Arial"/>
+              </a:rPr>
+              <a:t>HTML,</a:t>
+            </a:r>
+            <a:r>
+              <a:rPr sz="2750" spc="-100" dirty="0">
+                <a:latin typeface="Arial"/>
+                <a:cs typeface="Arial"/>
+              </a:rPr>
+              <a:t> </a:t>
+            </a:r>
+            <a:r>
+              <a:rPr sz="2750" spc="-85" dirty="0">
+                <a:latin typeface="Arial"/>
+                <a:cs typeface="Arial"/>
+              </a:rPr>
+              <a:t>specified</a:t>
+            </a:r>
+            <a:r>
+              <a:rPr sz="2750" spc="-125" dirty="0">
+                <a:latin typeface="Arial"/>
+                <a:cs typeface="Arial"/>
+              </a:rPr>
+              <a:t> </a:t>
+            </a:r>
+            <a:r>
+              <a:rPr sz="2750" spc="-140" dirty="0">
+                <a:latin typeface="Arial"/>
+                <a:cs typeface="Arial"/>
+              </a:rPr>
+              <a:t>using</a:t>
+            </a:r>
+            <a:r>
+              <a:rPr sz="2750" spc="-114" dirty="0">
+                <a:latin typeface="Arial"/>
+                <a:cs typeface="Arial"/>
+              </a:rPr>
+              <a:t> </a:t>
+            </a:r>
+            <a:r>
+              <a:rPr sz="2750" dirty="0">
+                <a:latin typeface="Arial"/>
+                <a:cs typeface="Arial"/>
+              </a:rPr>
+              <a:t>the</a:t>
+            </a:r>
+            <a:r>
+              <a:rPr sz="2750" spc="-120" dirty="0">
+                <a:latin typeface="Arial"/>
+                <a:cs typeface="Arial"/>
+              </a:rPr>
+              <a:t> </a:t>
+            </a:r>
+            <a:r>
+              <a:rPr sz="2750" dirty="0">
+                <a:latin typeface="Arial"/>
+                <a:cs typeface="Arial"/>
+              </a:rPr>
+              <a:t>alt</a:t>
+            </a:r>
+            <a:r>
+              <a:rPr sz="2750" spc="-114" dirty="0">
+                <a:latin typeface="Arial"/>
+                <a:cs typeface="Arial"/>
+              </a:rPr>
+              <a:t> </a:t>
+            </a:r>
+            <a:r>
+              <a:rPr sz="2750" dirty="0">
+                <a:latin typeface="Arial"/>
+                <a:cs typeface="Arial"/>
+              </a:rPr>
+              <a:t>attribute</a:t>
+            </a:r>
+            <a:r>
+              <a:rPr sz="2750" spc="-120" dirty="0">
+                <a:latin typeface="Arial"/>
+                <a:cs typeface="Arial"/>
+              </a:rPr>
+              <a:t> </a:t>
+            </a:r>
+            <a:r>
+              <a:rPr sz="2750" dirty="0">
+                <a:latin typeface="Arial"/>
+                <a:cs typeface="Arial"/>
+              </a:rPr>
+              <a:t>within</a:t>
+            </a:r>
+            <a:r>
+              <a:rPr sz="2750" spc="-45" dirty="0">
+                <a:latin typeface="Arial"/>
+                <a:cs typeface="Arial"/>
+              </a:rPr>
+              <a:t> </a:t>
+            </a:r>
+            <a:r>
+              <a:rPr sz="2750" dirty="0">
+                <a:latin typeface="Arial"/>
+                <a:cs typeface="Arial"/>
+              </a:rPr>
+              <a:t>the</a:t>
+            </a:r>
+            <a:r>
+              <a:rPr sz="2750" spc="-120" dirty="0">
+                <a:latin typeface="Arial"/>
+                <a:cs typeface="Arial"/>
+              </a:rPr>
+              <a:t> </a:t>
+            </a:r>
+            <a:r>
+              <a:rPr sz="2750" spc="-10" dirty="0">
+                <a:latin typeface="Arial"/>
+                <a:cs typeface="Arial"/>
+              </a:rPr>
+              <a:t>&lt;</a:t>
+            </a:r>
+            <a:r>
+              <a:rPr sz="2750" spc="-10" dirty="0" err="1">
+                <a:latin typeface="Arial"/>
+                <a:cs typeface="Arial"/>
+              </a:rPr>
+              <a:t>img</a:t>
+            </a:r>
+            <a:r>
+              <a:rPr sz="2750" spc="-10" dirty="0">
+                <a:latin typeface="Arial"/>
+                <a:cs typeface="Arial"/>
+              </a:rPr>
+              <a:t>&gt; </a:t>
+            </a:r>
+            <a:r>
+              <a:rPr sz="2750" spc="-105" dirty="0">
+                <a:latin typeface="Arial"/>
+                <a:cs typeface="Arial"/>
+              </a:rPr>
+              <a:t>tag.</a:t>
+            </a:r>
+            <a:r>
+              <a:rPr sz="2750" spc="-110" dirty="0">
+                <a:latin typeface="Arial"/>
+                <a:cs typeface="Arial"/>
+              </a:rPr>
+              <a:t> </a:t>
+            </a:r>
+            <a:r>
+              <a:rPr sz="2750" spc="70" dirty="0">
+                <a:latin typeface="Arial"/>
+                <a:cs typeface="Arial"/>
+              </a:rPr>
+              <a:t>It</a:t>
+            </a:r>
+            <a:r>
+              <a:rPr sz="2750" spc="-110" dirty="0">
+                <a:latin typeface="Arial"/>
+                <a:cs typeface="Arial"/>
+              </a:rPr>
+              <a:t> </a:t>
+            </a:r>
+            <a:r>
+              <a:rPr sz="2750" spc="-170" dirty="0">
+                <a:latin typeface="Arial"/>
+                <a:cs typeface="Arial"/>
+              </a:rPr>
+              <a:t>serves</a:t>
+            </a:r>
+            <a:r>
+              <a:rPr sz="2750" spc="-114" dirty="0">
+                <a:latin typeface="Arial"/>
+                <a:cs typeface="Arial"/>
+              </a:rPr>
+              <a:t> </a:t>
+            </a:r>
+            <a:r>
+              <a:rPr sz="2750" spc="-130" dirty="0">
+                <a:latin typeface="Arial"/>
+                <a:cs typeface="Arial"/>
+              </a:rPr>
+              <a:t>several</a:t>
+            </a:r>
+            <a:r>
+              <a:rPr sz="2750" spc="-114" dirty="0">
+                <a:latin typeface="Arial"/>
+                <a:cs typeface="Arial"/>
+              </a:rPr>
+              <a:t> </a:t>
+            </a:r>
+            <a:r>
+              <a:rPr sz="2750" spc="-10" dirty="0">
+                <a:latin typeface="Arial"/>
+                <a:cs typeface="Arial"/>
+              </a:rPr>
+              <a:t>important</a:t>
+            </a:r>
+            <a:r>
+              <a:rPr sz="2750" spc="-114" dirty="0">
+                <a:latin typeface="Arial"/>
+                <a:cs typeface="Arial"/>
+              </a:rPr>
+              <a:t> purposes </a:t>
+            </a:r>
+            <a:r>
+              <a:rPr sz="2750" dirty="0">
+                <a:latin typeface="Arial"/>
+                <a:cs typeface="Arial"/>
+              </a:rPr>
+              <a:t>for</a:t>
+            </a:r>
+            <a:r>
+              <a:rPr sz="2750" spc="-75" dirty="0">
+                <a:latin typeface="Arial"/>
+                <a:cs typeface="Arial"/>
+              </a:rPr>
+              <a:t> </a:t>
+            </a:r>
+            <a:r>
+              <a:rPr sz="2750" spc="-470" dirty="0">
+                <a:latin typeface="Arial"/>
+                <a:cs typeface="Arial"/>
+              </a:rPr>
+              <a:t>SEO</a:t>
+            </a:r>
+            <a:endParaRPr sz="2750" dirty="0">
+              <a:latin typeface="Arial"/>
+              <a:cs typeface="Arial"/>
+            </a:endParaRPr>
+          </a:p>
+          <a:p>
+            <a:pPr marL="241300" marR="279400" indent="-229235">
+              <a:lnSpc>
+                <a:spcPct val="92200"/>
+              </a:lnSpc>
+              <a:spcBef>
+                <a:spcPts val="940"/>
+              </a:spcBef>
+              <a:buChar char="•"/>
+              <a:tabLst>
+                <a:tab pos="241300" algn="l"/>
+                <a:tab pos="321945" algn="l"/>
+              </a:tabLst>
+            </a:pPr>
+            <a:r>
+              <a:rPr sz="2750" dirty="0">
+                <a:latin typeface="Arial"/>
+                <a:cs typeface="Arial"/>
+              </a:rPr>
+              <a:t>	If</a:t>
+            </a:r>
+            <a:r>
+              <a:rPr sz="2750" spc="-100" dirty="0">
+                <a:latin typeface="Arial"/>
+                <a:cs typeface="Arial"/>
+              </a:rPr>
+              <a:t> </a:t>
+            </a:r>
+            <a:r>
+              <a:rPr sz="2750" spc="-135" dirty="0">
+                <a:latin typeface="Arial"/>
+                <a:cs typeface="Arial"/>
+              </a:rPr>
+              <a:t>an</a:t>
+            </a:r>
+            <a:r>
+              <a:rPr sz="2750" spc="-110" dirty="0">
+                <a:latin typeface="Arial"/>
+                <a:cs typeface="Arial"/>
+              </a:rPr>
+              <a:t> </a:t>
+            </a:r>
+            <a:r>
+              <a:rPr sz="2750" spc="-140" dirty="0">
+                <a:latin typeface="Arial"/>
+                <a:cs typeface="Arial"/>
+              </a:rPr>
+              <a:t>image</a:t>
+            </a:r>
+            <a:r>
+              <a:rPr sz="2750" spc="-114" dirty="0">
+                <a:latin typeface="Arial"/>
+                <a:cs typeface="Arial"/>
+              </a:rPr>
+              <a:t> </a:t>
+            </a:r>
+            <a:r>
+              <a:rPr sz="2750" spc="-85" dirty="0">
+                <a:latin typeface="Arial"/>
+                <a:cs typeface="Arial"/>
+              </a:rPr>
+              <a:t>fails</a:t>
+            </a:r>
+            <a:r>
+              <a:rPr sz="2750" spc="-40" dirty="0">
+                <a:latin typeface="Arial"/>
+                <a:cs typeface="Arial"/>
+              </a:rPr>
+              <a:t> </a:t>
+            </a:r>
+            <a:r>
+              <a:rPr sz="2750" spc="-25" dirty="0">
+                <a:latin typeface="Arial"/>
+                <a:cs typeface="Arial"/>
+              </a:rPr>
+              <a:t>to </a:t>
+            </a:r>
+            <a:r>
+              <a:rPr sz="2750" spc="-70" dirty="0">
+                <a:latin typeface="Arial"/>
+                <a:cs typeface="Arial"/>
+              </a:rPr>
+              <a:t>load,</a:t>
+            </a:r>
+            <a:r>
+              <a:rPr sz="2750" spc="-105" dirty="0">
+                <a:latin typeface="Arial"/>
+                <a:cs typeface="Arial"/>
+              </a:rPr>
+              <a:t> </a:t>
+            </a:r>
+            <a:r>
+              <a:rPr sz="2750" dirty="0">
+                <a:latin typeface="Arial"/>
+                <a:cs typeface="Arial"/>
+              </a:rPr>
+              <a:t>the</a:t>
+            </a:r>
+            <a:r>
+              <a:rPr sz="2750" spc="-120" dirty="0">
+                <a:latin typeface="Arial"/>
+                <a:cs typeface="Arial"/>
+              </a:rPr>
+              <a:t> </a:t>
+            </a:r>
+            <a:r>
+              <a:rPr sz="2750" dirty="0">
+                <a:latin typeface="Arial"/>
+                <a:cs typeface="Arial"/>
+              </a:rPr>
+              <a:t>alt</a:t>
+            </a:r>
+            <a:r>
+              <a:rPr sz="2750" spc="-114" dirty="0">
+                <a:latin typeface="Arial"/>
+                <a:cs typeface="Arial"/>
+              </a:rPr>
+              <a:t> </a:t>
+            </a:r>
+            <a:r>
+              <a:rPr sz="2750" spc="-10" dirty="0">
+                <a:latin typeface="Arial"/>
+                <a:cs typeface="Arial"/>
+              </a:rPr>
+              <a:t>text</a:t>
+            </a:r>
+            <a:r>
+              <a:rPr sz="2750" spc="-125" dirty="0">
+                <a:latin typeface="Arial"/>
+                <a:cs typeface="Arial"/>
+              </a:rPr>
+              <a:t> </a:t>
+            </a:r>
+            <a:r>
+              <a:rPr sz="2750" spc="-135" dirty="0">
+                <a:latin typeface="Arial"/>
+                <a:cs typeface="Arial"/>
+              </a:rPr>
+              <a:t>appears</a:t>
+            </a:r>
+            <a:r>
+              <a:rPr sz="2750" spc="-120" dirty="0">
+                <a:latin typeface="Arial"/>
+                <a:cs typeface="Arial"/>
+              </a:rPr>
+              <a:t> </a:t>
+            </a:r>
+            <a:r>
+              <a:rPr sz="2750" dirty="0">
+                <a:latin typeface="Arial"/>
+                <a:cs typeface="Arial"/>
+              </a:rPr>
+              <a:t>in</a:t>
+            </a:r>
+            <a:r>
+              <a:rPr sz="2750" spc="-125" dirty="0">
+                <a:latin typeface="Arial"/>
+                <a:cs typeface="Arial"/>
+              </a:rPr>
+              <a:t> place</a:t>
+            </a:r>
+            <a:r>
+              <a:rPr sz="2750" spc="-120" dirty="0">
+                <a:latin typeface="Arial"/>
+                <a:cs typeface="Arial"/>
+              </a:rPr>
+              <a:t> </a:t>
+            </a:r>
+            <a:r>
+              <a:rPr sz="2750" dirty="0">
+                <a:latin typeface="Arial"/>
+                <a:cs typeface="Arial"/>
+              </a:rPr>
+              <a:t>of</a:t>
+            </a:r>
+            <a:r>
+              <a:rPr sz="2750" spc="-180" dirty="0">
+                <a:latin typeface="Arial"/>
+                <a:cs typeface="Arial"/>
+              </a:rPr>
+              <a:t> </a:t>
+            </a:r>
+            <a:r>
+              <a:rPr sz="2750" dirty="0">
+                <a:latin typeface="Arial"/>
+                <a:cs typeface="Arial"/>
+              </a:rPr>
+              <a:t>the</a:t>
+            </a:r>
+            <a:r>
+              <a:rPr sz="2750" spc="-120" dirty="0">
+                <a:latin typeface="Arial"/>
+                <a:cs typeface="Arial"/>
+              </a:rPr>
+              <a:t> </a:t>
+            </a:r>
+            <a:r>
+              <a:rPr sz="2750" spc="-140" dirty="0">
+                <a:latin typeface="Arial"/>
+                <a:cs typeface="Arial"/>
+              </a:rPr>
+              <a:t>image,</a:t>
+            </a:r>
+            <a:r>
+              <a:rPr sz="2750" spc="-100" dirty="0">
+                <a:latin typeface="Arial"/>
+                <a:cs typeface="Arial"/>
+              </a:rPr>
+              <a:t> </a:t>
+            </a:r>
+            <a:r>
+              <a:rPr sz="2750" spc="-60" dirty="0">
+                <a:latin typeface="Arial"/>
+                <a:cs typeface="Arial"/>
+              </a:rPr>
+              <a:t>providing</a:t>
+            </a:r>
+            <a:r>
+              <a:rPr sz="2750" spc="-120" dirty="0">
+                <a:latin typeface="Arial"/>
+                <a:cs typeface="Arial"/>
+              </a:rPr>
+              <a:t> </a:t>
+            </a:r>
+            <a:r>
+              <a:rPr sz="2750" spc="-65" dirty="0">
+                <a:latin typeface="Arial"/>
+                <a:cs typeface="Arial"/>
+              </a:rPr>
+              <a:t>context</a:t>
+            </a:r>
+            <a:r>
+              <a:rPr sz="2750" spc="-114" dirty="0">
+                <a:latin typeface="Arial"/>
+                <a:cs typeface="Arial"/>
+              </a:rPr>
+              <a:t> </a:t>
+            </a:r>
+            <a:r>
+              <a:rPr sz="2750" spc="-25" dirty="0">
+                <a:latin typeface="Arial"/>
+                <a:cs typeface="Arial"/>
+              </a:rPr>
+              <a:t>so </a:t>
+            </a:r>
+            <a:r>
+              <a:rPr sz="2750" spc="-165" dirty="0">
+                <a:latin typeface="Arial"/>
+                <a:cs typeface="Arial"/>
+              </a:rPr>
+              <a:t>users</a:t>
+            </a:r>
+            <a:r>
+              <a:rPr sz="2750" spc="-90" dirty="0">
+                <a:latin typeface="Arial"/>
+                <a:cs typeface="Arial"/>
+              </a:rPr>
+              <a:t> </a:t>
+            </a:r>
+            <a:r>
+              <a:rPr sz="2750" spc="-20" dirty="0">
+                <a:latin typeface="Arial"/>
+                <a:cs typeface="Arial"/>
+              </a:rPr>
+              <a:t>aren’t</a:t>
+            </a:r>
+            <a:r>
+              <a:rPr sz="2750" spc="-85" dirty="0">
+                <a:latin typeface="Arial"/>
+                <a:cs typeface="Arial"/>
+              </a:rPr>
+              <a:t> </a:t>
+            </a:r>
+            <a:r>
+              <a:rPr sz="2750" dirty="0">
+                <a:latin typeface="Arial"/>
+                <a:cs typeface="Arial"/>
+              </a:rPr>
+              <a:t>left</a:t>
+            </a:r>
+            <a:r>
+              <a:rPr sz="2750" spc="-80" dirty="0">
+                <a:latin typeface="Arial"/>
+                <a:cs typeface="Arial"/>
+              </a:rPr>
+              <a:t> </a:t>
+            </a:r>
+            <a:r>
+              <a:rPr sz="2750" spc="-35" dirty="0">
+                <a:latin typeface="Arial"/>
+                <a:cs typeface="Arial"/>
+              </a:rPr>
+              <a:t>guessing.</a:t>
+            </a:r>
+            <a:endParaRPr sz="2750" dirty="0">
+              <a:latin typeface="Arial"/>
+              <a:cs typeface="Arial"/>
+            </a:endParaRPr>
+          </a:p>
+        </p:txBody>
+      </p:sp>
+    </p:spTree>
+  </p:cSld>
+  <p:clrMapOvr>
+    <a:masterClrMapping/>
+  </p:clrMapOvr>
+</p:sld>
+</file>
+
+<file path=ppt/slides/slide12.xml><?xml version="1.0" encoding="utf-8"?>
 <p:sld xmlns:a="http://schemas.openxmlformats.org/drawingml/2006/main" xmlns:r="http://schemas.openxmlformats.org/officeDocument/2006/relationships" xmlns:p="http://schemas.openxmlformats.org/presentationml/2006/main">
   <p:cSld>
     <p:spTree>
@@ -4976,7 +5699,7 @@
           <p:cNvPr id="2" name="Title 1">
             <a:extLst>
               <a:ext uri="{FF2B5EF4-FFF2-40B4-BE49-F238E27FC236}">
-                <a16:creationId xmlns:a16="http://schemas.microsoft.com/office/drawing/2014/main" id="{269B02B9-0513-CBBB-21B4-1B4A23F756F6}"/>
+                <a16:creationId xmlns:a16="http://schemas.microsoft.com/office/drawing/2014/main" id="{F65E3CAD-1F92-FAC1-1A69-BB5F8694FC18}"/>
               </a:ext>
             </a:extLst>
           </p:cNvPr>
@@ -4989,8 +5712,8 @@
         </p:nvSpPr>
         <p:spPr>
           <a:xfrm>
-            <a:off x="841057" y="307593"/>
-            <a:ext cx="9158922" cy="677108"/>
+            <a:off x="1936002" y="537242"/>
+            <a:ext cx="6500116" cy="572620"/>
           </a:xfrm>
         </p:spPr>
         <p:txBody>
@@ -5000,888 +5723,166 @@
           <a:lstStyle/>
           <a:p>
             <a:r>
-              <a:rPr lang="en-DK" dirty="0"/>
-              <a:t>Meta No index</a:t>
-            </a:r>
-          </a:p>
-        </p:txBody>
-      </p:sp>
-      <p:sp>
-        <p:nvSpPr>
-          <p:cNvPr id="3" name="Text Placeholder 2">
+              <a:rPr lang="en-DK"/>
+              <a:t>Validering</a:t>
+            </a:r>
+          </a:p>
+        </p:txBody>
+      </p:sp>
+      <p:sp>
+        <p:nvSpPr>
+          <p:cNvPr id="3" name="TextBox 2">
             <a:extLst>
               <a:ext uri="{FF2B5EF4-FFF2-40B4-BE49-F238E27FC236}">
-                <a16:creationId xmlns:a16="http://schemas.microsoft.com/office/drawing/2014/main" id="{76AA0898-BFE6-6818-761B-8CCC5395BE35}"/>
+                <a16:creationId xmlns:a16="http://schemas.microsoft.com/office/drawing/2014/main" id="{F57C6769-851B-1D3A-3054-4D1713D7384A}"/>
               </a:ext>
             </a:extLst>
           </p:cNvPr>
-          <p:cNvSpPr>
-            <a:spLocks noGrp="1"/>
-          </p:cNvSpPr>
-          <p:nvPr>
-            <p:ph type="body" idx="1"/>
-          </p:nvPr>
+          <p:cNvSpPr txBox="1"/>
+          <p:nvPr/>
         </p:nvSpPr>
         <p:spPr>
           <a:xfrm>
-            <a:off x="917575" y="1702288"/>
-            <a:ext cx="10300970" cy="3200876"/>
-          </a:xfrm>
-        </p:spPr>
-        <p:txBody>
-          <a:bodyPr vert="horz" lIns="91440" tIns="45720" rIns="91440" bIns="45720" rtlCol="0" anchor="t">
-            <a:normAutofit/>
-          </a:bodyPr>
-          <a:lstStyle/>
-          <a:p>
-            <a:pPr marL="0" indent="0">
-              <a:buNone/>
-            </a:pPr>
-            <a:r>
-              <a:rPr lang="en-DK" dirty="0"/>
-              <a:t> &lt;meta name="robots" content="noindex"&gt;</a:t>
-            </a:r>
-            <a:endParaRPr lang="en-GB" dirty="0"/>
-          </a:p>
-          <a:p>
-            <a:endParaRPr lang="en-GB" dirty="0"/>
-          </a:p>
-          <a:p>
-            <a:pPr marL="0" indent="0">
-              <a:buNone/>
-            </a:pPr>
-            <a:r>
-              <a:rPr lang="en-DK" dirty="0"/>
-              <a:t>tell search engines not to include a page in their search results.</a:t>
-            </a:r>
-            <a:endParaRPr lang="en-GB" dirty="0"/>
-          </a:p>
-          <a:p>
-            <a:endParaRPr lang="en-DK" dirty="0"/>
-          </a:p>
-        </p:txBody>
-      </p:sp>
-    </p:spTree>
-    <p:extLst>
-      <p:ext uri="{BB962C8B-B14F-4D97-AF65-F5344CB8AC3E}">
-        <p14:creationId xmlns:p14="http://schemas.microsoft.com/office/powerpoint/2010/main" val="2655987921"/>
-      </p:ext>
-    </p:extLst>
-  </p:cSld>
-  <p:clrMapOvr>
-    <a:masterClrMapping/>
-  </p:clrMapOvr>
-</p:sld>
-</file>
-
-<file path=ppt/slides/slide12.xml><?xml version="1.0" encoding="utf-8"?>
-<p:sld xmlns:a="http://schemas.openxmlformats.org/drawingml/2006/main" xmlns:r="http://schemas.openxmlformats.org/officeDocument/2006/relationships" xmlns:p="http://schemas.openxmlformats.org/presentationml/2006/main" showMasterSp="0">
-  <p:cSld>
-    <p:spTree>
-      <p:nvGrpSpPr>
-        <p:cNvPr id="1" name=""/>
-        <p:cNvGrpSpPr/>
-        <p:nvPr/>
-      </p:nvGrpSpPr>
-      <p:grpSpPr>
-        <a:xfrm>
-          <a:off x="0" y="0"/>
-          <a:ext cx="0" cy="0"/>
-          <a:chOff x="0" y="0"/>
-          <a:chExt cx="0" cy="0"/>
-        </a:xfrm>
-      </p:grpSpPr>
-      <p:sp>
-        <p:nvSpPr>
-          <p:cNvPr id="2" name="object 2"/>
-          <p:cNvSpPr txBox="1">
-            <a:spLocks noGrp="1"/>
-          </p:cNvSpPr>
-          <p:nvPr>
-            <p:ph type="title"/>
-          </p:nvPr>
-        </p:nvSpPr>
-        <p:spPr>
-          <a:xfrm>
-            <a:off x="917575" y="736023"/>
-            <a:ext cx="1640839" cy="447558"/>
+            <a:off x="2551043" y="1714785"/>
+            <a:ext cx="4928804" cy="3128222"/>
           </a:xfrm>
           <a:prstGeom prst="rect">
             <a:avLst/>
           </a:prstGeom>
+          <a:noFill/>
         </p:spPr>
         <p:txBody>
-          <a:bodyPr vert="horz" wrap="square" lIns="0" tIns="16510" rIns="0" bIns="0" rtlCol="0">
+          <a:bodyPr rot="0" spcFirstLastPara="0" vertOverflow="overflow" horzOverflow="overflow" vert="horz" wrap="square" lIns="82988" tIns="41494" rIns="82988" bIns="41494" numCol="1" spcCol="0" rtlCol="0" fromWordArt="0" anchor="t" anchorCtr="0" forceAA="0" compatLnSpc="1">
+            <a:prstTxWarp prst="textNoShape">
+              <a:avLst/>
+            </a:prstTxWarp>
             <a:spAutoFit/>
           </a:bodyPr>
           <a:lstStyle/>
           <a:p>
-            <a:pPr marL="12700">
-              <a:lnSpc>
-                <a:spcPct val="100000"/>
-              </a:lnSpc>
-              <a:spcBef>
-                <a:spcPts val="130"/>
-              </a:spcBef>
+            <a:pPr marL="315366" indent="-315366">
+              <a:buFont typeface="Wingdings"/>
+              <a:buChar char="§"/>
             </a:pPr>
             <a:r>
-              <a:rPr spc="-80"/>
-              <a:t>Alt</a:t>
-            </a:r>
-            <a:r>
-              <a:rPr spc="-215"/>
+              <a:rPr lang="en-US" sz="2541">
+                <a:solidFill>
+                  <a:srgbClr val="404040"/>
+                </a:solidFill>
+                <a:latin typeface="Trebuchet MS"/>
+              </a:rPr>
+              <a:t>Check your code for syntax errors</a:t>
+            </a:r>
+          </a:p>
+          <a:p>
+            <a:pPr marL="672227" indent="-257272">
+              <a:buFont typeface="Wingdings"/>
+              <a:buChar char="§"/>
+            </a:pPr>
+            <a:r>
+              <a:rPr lang="en-US" sz="2178">
+                <a:solidFill>
+                  <a:srgbClr val="404040"/>
+                </a:solidFill>
+                <a:latin typeface="Trebuchet MS"/>
+              </a:rPr>
+              <a:t>Benefit:</a:t>
+            </a:r>
+          </a:p>
+          <a:p>
+            <a:pPr marL="1037387" indent="-207477">
+              <a:buFont typeface="Wingdings"/>
+              <a:buChar char="§"/>
+            </a:pPr>
+            <a:r>
+              <a:rPr lang="en-US" sz="2178">
+                <a:solidFill>
+                  <a:srgbClr val="404040"/>
+                </a:solidFill>
+                <a:latin typeface="Trebuchet MS"/>
+              </a:rPr>
+              <a:t>Valid code </a:t>
+            </a:r>
+            <a:r>
+              <a:rPr lang="en-US" sz="2178">
+                <a:solidFill>
+                  <a:srgbClr val="404040"/>
+                </a:solidFill>
+                <a:latin typeface="Trebuchet MS"/>
+                <a:sym typeface="Wingdings"/>
+              </a:rPr>
+              <a:t></a:t>
+            </a:r>
+            <a:r>
+              <a:rPr lang="en-US" sz="2178">
+                <a:solidFill>
+                  <a:srgbClr val="404040"/>
+                </a:solidFill>
+                <a:latin typeface="Trebuchet MS"/>
+              </a:rPr>
               <a:t> </a:t>
             </a:r>
-            <a:r>
-              <a:rPr lang="da-DK" spc="-215"/>
-              <a:t> </a:t>
-            </a:r>
-            <a:r>
-              <a:rPr spc="-70"/>
-              <a:t>text</a:t>
-            </a:r>
-          </a:p>
-        </p:txBody>
-      </p:sp>
-      <p:sp>
-        <p:nvSpPr>
-          <p:cNvPr id="3" name="object 3"/>
-          <p:cNvSpPr txBox="1"/>
-          <p:nvPr/>
-        </p:nvSpPr>
-        <p:spPr>
-          <a:xfrm>
-            <a:off x="917575" y="1794255"/>
-            <a:ext cx="10293350" cy="2111475"/>
-          </a:xfrm>
-          <a:prstGeom prst="rect">
-            <a:avLst/>
-          </a:prstGeom>
-        </p:spPr>
-        <p:txBody>
-          <a:bodyPr vert="horz" wrap="square" lIns="0" tIns="48895" rIns="0" bIns="0" rtlCol="0">
-            <a:spAutoFit/>
-          </a:bodyPr>
-          <a:lstStyle/>
-          <a:p>
-            <a:pPr marL="241300" marR="415290" indent="-229235">
-              <a:lnSpc>
-                <a:spcPct val="92200"/>
-              </a:lnSpc>
-              <a:spcBef>
-                <a:spcPts val="385"/>
-              </a:spcBef>
-              <a:buChar char="•"/>
-              <a:tabLst>
-                <a:tab pos="241300" algn="l"/>
-              </a:tabLst>
+            <a:br>
+              <a:rPr lang="en-US" sz="2178">
+                <a:solidFill>
+                  <a:srgbClr val="404040"/>
+                </a:solidFill>
+                <a:latin typeface="Trebuchet MS"/>
+              </a:rPr>
+            </a:br>
+            <a:r>
+              <a:rPr lang="en-US" sz="2178">
+                <a:solidFill>
+                  <a:srgbClr val="404040"/>
+                </a:solidFill>
+                <a:latin typeface="Trebuchet MS"/>
+              </a:rPr>
+              <a:t>more consistent browser display</a:t>
+            </a:r>
+          </a:p>
+          <a:p>
+            <a:pPr marL="1037387" indent="-207477"/>
+            <a:endParaRPr lang="LID4096" sz="1634"/>
+          </a:p>
+          <a:p>
+            <a:pPr marL="315366" indent="-315366">
+              <a:buFont typeface="Wingdings"/>
+              <a:buChar char="§"/>
             </a:pPr>
             <a:r>
-              <a:rPr sz="2750" dirty="0">
-                <a:latin typeface="Arial"/>
-                <a:cs typeface="Arial"/>
-              </a:rPr>
-              <a:t>Alt</a:t>
-            </a:r>
-            <a:r>
-              <a:rPr sz="2750" spc="-140" dirty="0">
-                <a:latin typeface="Arial"/>
-                <a:cs typeface="Arial"/>
-              </a:rPr>
-              <a:t> </a:t>
-            </a:r>
-            <a:r>
-              <a:rPr sz="2750" spc="-10" dirty="0">
-                <a:latin typeface="Arial"/>
-                <a:cs typeface="Arial"/>
-              </a:rPr>
-              <a:t>text</a:t>
-            </a:r>
-            <a:r>
-              <a:rPr sz="2750" spc="-135" dirty="0">
-                <a:latin typeface="Arial"/>
-                <a:cs typeface="Arial"/>
-              </a:rPr>
-              <a:t> </a:t>
-            </a:r>
-            <a:r>
-              <a:rPr sz="2750" spc="-50" dirty="0">
-                <a:latin typeface="Arial"/>
-                <a:cs typeface="Arial"/>
-              </a:rPr>
-              <a:t>(alternative</a:t>
-            </a:r>
-            <a:r>
-              <a:rPr sz="2750" spc="-125" dirty="0">
-                <a:latin typeface="Arial"/>
-                <a:cs typeface="Arial"/>
-              </a:rPr>
-              <a:t> </a:t>
-            </a:r>
-            <a:r>
-              <a:rPr sz="2750" spc="-10" dirty="0">
-                <a:latin typeface="Arial"/>
-                <a:cs typeface="Arial"/>
-              </a:rPr>
-              <a:t>text)</a:t>
-            </a:r>
-            <a:r>
-              <a:rPr sz="2750" spc="-114" dirty="0">
-                <a:latin typeface="Arial"/>
-                <a:cs typeface="Arial"/>
-              </a:rPr>
-              <a:t> </a:t>
-            </a:r>
-            <a:r>
-              <a:rPr sz="2750" spc="-125" dirty="0">
-                <a:latin typeface="Arial"/>
-                <a:cs typeface="Arial"/>
-              </a:rPr>
-              <a:t>is</a:t>
-            </a:r>
-            <a:r>
-              <a:rPr sz="2750" spc="-130" dirty="0">
-                <a:latin typeface="Arial"/>
-                <a:cs typeface="Arial"/>
-              </a:rPr>
-              <a:t> </a:t>
-            </a:r>
-            <a:r>
-              <a:rPr sz="2750" spc="-204" dirty="0">
-                <a:latin typeface="Arial"/>
-                <a:cs typeface="Arial"/>
-              </a:rPr>
-              <a:t>a</a:t>
-            </a:r>
-            <a:r>
-              <a:rPr sz="2750" spc="-150" dirty="0">
-                <a:latin typeface="Arial"/>
-                <a:cs typeface="Arial"/>
-              </a:rPr>
-              <a:t> </a:t>
-            </a:r>
-            <a:r>
-              <a:rPr sz="2750" spc="-40" dirty="0">
-                <a:latin typeface="Arial"/>
-                <a:cs typeface="Arial"/>
-              </a:rPr>
-              <a:t>short,</a:t>
-            </a:r>
-            <a:r>
-              <a:rPr sz="2750" spc="-185" dirty="0">
-                <a:latin typeface="Arial"/>
-                <a:cs typeface="Arial"/>
-              </a:rPr>
-              <a:t> </a:t>
-            </a:r>
-            <a:r>
-              <a:rPr sz="2750" spc="-75" dirty="0">
-                <a:latin typeface="Arial"/>
-                <a:cs typeface="Arial"/>
-              </a:rPr>
-              <a:t>descriptive</a:t>
-            </a:r>
-            <a:r>
-              <a:rPr sz="2750" spc="-125" dirty="0">
-                <a:latin typeface="Arial"/>
-                <a:cs typeface="Arial"/>
-              </a:rPr>
-              <a:t> </a:t>
-            </a:r>
-            <a:r>
-              <a:rPr sz="2750" dirty="0">
-                <a:latin typeface="Arial"/>
-                <a:cs typeface="Arial"/>
-              </a:rPr>
-              <a:t>text</a:t>
-            </a:r>
-            <a:r>
-              <a:rPr sz="2750" spc="-130" dirty="0">
-                <a:latin typeface="Arial"/>
-                <a:cs typeface="Arial"/>
-              </a:rPr>
-              <a:t> </a:t>
-            </a:r>
-            <a:r>
-              <a:rPr sz="2750" spc="-135" dirty="0">
-                <a:latin typeface="Arial"/>
-                <a:cs typeface="Arial"/>
-              </a:rPr>
-              <a:t>associated</a:t>
-            </a:r>
-            <a:r>
-              <a:rPr sz="2750" spc="-130" dirty="0">
-                <a:latin typeface="Arial"/>
-                <a:cs typeface="Arial"/>
-              </a:rPr>
-              <a:t> </a:t>
-            </a:r>
-            <a:r>
-              <a:rPr sz="2750" spc="-20" dirty="0">
-                <a:latin typeface="Arial"/>
-                <a:cs typeface="Arial"/>
-              </a:rPr>
-              <a:t>with </a:t>
-            </a:r>
-            <a:r>
-              <a:rPr sz="2750" spc="-160" dirty="0">
-                <a:latin typeface="Arial"/>
-                <a:cs typeface="Arial"/>
-              </a:rPr>
-              <a:t>images</a:t>
-            </a:r>
-            <a:r>
-              <a:rPr sz="2750" spc="-125" dirty="0">
-                <a:latin typeface="Arial"/>
-                <a:cs typeface="Arial"/>
-              </a:rPr>
-              <a:t> </a:t>
-            </a:r>
-            <a:r>
-              <a:rPr sz="2750" dirty="0">
-                <a:latin typeface="Arial"/>
-                <a:cs typeface="Arial"/>
-              </a:rPr>
-              <a:t>in</a:t>
-            </a:r>
-            <a:r>
-              <a:rPr sz="2750" spc="-125" dirty="0">
-                <a:latin typeface="Arial"/>
-                <a:cs typeface="Arial"/>
-              </a:rPr>
-              <a:t> </a:t>
-            </a:r>
-            <a:r>
-              <a:rPr sz="2750" spc="-195" dirty="0">
-                <a:latin typeface="Arial"/>
-                <a:cs typeface="Arial"/>
-              </a:rPr>
-              <a:t>HTML,</a:t>
-            </a:r>
-            <a:r>
-              <a:rPr sz="2750" spc="-100" dirty="0">
-                <a:latin typeface="Arial"/>
-                <a:cs typeface="Arial"/>
-              </a:rPr>
-              <a:t> </a:t>
-            </a:r>
-            <a:r>
-              <a:rPr sz="2750" spc="-85" dirty="0">
-                <a:latin typeface="Arial"/>
-                <a:cs typeface="Arial"/>
-              </a:rPr>
-              <a:t>specified</a:t>
-            </a:r>
-            <a:r>
-              <a:rPr sz="2750" spc="-125" dirty="0">
-                <a:latin typeface="Arial"/>
-                <a:cs typeface="Arial"/>
-              </a:rPr>
-              <a:t> </a:t>
-            </a:r>
-            <a:r>
-              <a:rPr sz="2750" spc="-140" dirty="0">
-                <a:latin typeface="Arial"/>
-                <a:cs typeface="Arial"/>
-              </a:rPr>
-              <a:t>using</a:t>
-            </a:r>
-            <a:r>
-              <a:rPr sz="2750" spc="-114" dirty="0">
-                <a:latin typeface="Arial"/>
-                <a:cs typeface="Arial"/>
-              </a:rPr>
-              <a:t> </a:t>
-            </a:r>
-            <a:r>
-              <a:rPr sz="2750" dirty="0">
-                <a:latin typeface="Arial"/>
-                <a:cs typeface="Arial"/>
-              </a:rPr>
-              <a:t>the</a:t>
-            </a:r>
-            <a:r>
-              <a:rPr sz="2750" spc="-120" dirty="0">
-                <a:latin typeface="Arial"/>
-                <a:cs typeface="Arial"/>
-              </a:rPr>
-              <a:t> </a:t>
-            </a:r>
-            <a:r>
-              <a:rPr sz="2750" dirty="0">
-                <a:latin typeface="Arial"/>
-                <a:cs typeface="Arial"/>
-              </a:rPr>
-              <a:t>alt</a:t>
-            </a:r>
-            <a:r>
-              <a:rPr sz="2750" spc="-114" dirty="0">
-                <a:latin typeface="Arial"/>
-                <a:cs typeface="Arial"/>
-              </a:rPr>
-              <a:t> </a:t>
-            </a:r>
-            <a:r>
-              <a:rPr sz="2750" dirty="0">
-                <a:latin typeface="Arial"/>
-                <a:cs typeface="Arial"/>
-              </a:rPr>
-              <a:t>attribute</a:t>
-            </a:r>
-            <a:r>
-              <a:rPr sz="2750" spc="-120" dirty="0">
-                <a:latin typeface="Arial"/>
-                <a:cs typeface="Arial"/>
-              </a:rPr>
-              <a:t> </a:t>
-            </a:r>
-            <a:r>
-              <a:rPr sz="2750" dirty="0">
-                <a:latin typeface="Arial"/>
-                <a:cs typeface="Arial"/>
-              </a:rPr>
-              <a:t>within</a:t>
-            </a:r>
-            <a:r>
-              <a:rPr sz="2750" spc="-45" dirty="0">
-                <a:latin typeface="Arial"/>
-                <a:cs typeface="Arial"/>
-              </a:rPr>
-              <a:t> </a:t>
-            </a:r>
-            <a:r>
-              <a:rPr sz="2750" dirty="0">
-                <a:latin typeface="Arial"/>
-                <a:cs typeface="Arial"/>
-              </a:rPr>
-              <a:t>the</a:t>
-            </a:r>
-            <a:r>
-              <a:rPr sz="2750" spc="-120" dirty="0">
-                <a:latin typeface="Arial"/>
-                <a:cs typeface="Arial"/>
-              </a:rPr>
-              <a:t> </a:t>
-            </a:r>
-            <a:r>
-              <a:rPr sz="2750" spc="-10" dirty="0">
-                <a:latin typeface="Arial"/>
-                <a:cs typeface="Arial"/>
-              </a:rPr>
-              <a:t>&lt;</a:t>
-            </a:r>
-            <a:r>
-              <a:rPr sz="2750" spc="-10" dirty="0" err="1">
-                <a:latin typeface="Arial"/>
-                <a:cs typeface="Arial"/>
-              </a:rPr>
-              <a:t>img</a:t>
-            </a:r>
-            <a:r>
-              <a:rPr sz="2750" spc="-10" dirty="0">
-                <a:latin typeface="Arial"/>
-                <a:cs typeface="Arial"/>
-              </a:rPr>
-              <a:t>&gt; </a:t>
-            </a:r>
-            <a:r>
-              <a:rPr sz="2750" spc="-105" dirty="0">
-                <a:latin typeface="Arial"/>
-                <a:cs typeface="Arial"/>
-              </a:rPr>
-              <a:t>tag.</a:t>
-            </a:r>
-            <a:r>
-              <a:rPr sz="2750" spc="-110" dirty="0">
-                <a:latin typeface="Arial"/>
-                <a:cs typeface="Arial"/>
-              </a:rPr>
-              <a:t> </a:t>
-            </a:r>
-            <a:r>
-              <a:rPr sz="2750" spc="70" dirty="0">
-                <a:latin typeface="Arial"/>
-                <a:cs typeface="Arial"/>
-              </a:rPr>
-              <a:t>It</a:t>
-            </a:r>
-            <a:r>
-              <a:rPr sz="2750" spc="-110" dirty="0">
-                <a:latin typeface="Arial"/>
-                <a:cs typeface="Arial"/>
-              </a:rPr>
-              <a:t> </a:t>
-            </a:r>
-            <a:r>
-              <a:rPr sz="2750" spc="-170" dirty="0">
-                <a:latin typeface="Arial"/>
-                <a:cs typeface="Arial"/>
-              </a:rPr>
-              <a:t>serves</a:t>
-            </a:r>
-            <a:r>
-              <a:rPr sz="2750" spc="-114" dirty="0">
-                <a:latin typeface="Arial"/>
-                <a:cs typeface="Arial"/>
-              </a:rPr>
-              <a:t> </a:t>
-            </a:r>
-            <a:r>
-              <a:rPr sz="2750" spc="-130" dirty="0">
-                <a:latin typeface="Arial"/>
-                <a:cs typeface="Arial"/>
-              </a:rPr>
-              <a:t>several</a:t>
-            </a:r>
-            <a:r>
-              <a:rPr sz="2750" spc="-114" dirty="0">
-                <a:latin typeface="Arial"/>
-                <a:cs typeface="Arial"/>
-              </a:rPr>
-              <a:t> </a:t>
-            </a:r>
-            <a:r>
-              <a:rPr sz="2750" spc="-10" dirty="0">
-                <a:latin typeface="Arial"/>
-                <a:cs typeface="Arial"/>
-              </a:rPr>
-              <a:t>important</a:t>
-            </a:r>
-            <a:r>
-              <a:rPr sz="2750" spc="-114" dirty="0">
-                <a:latin typeface="Arial"/>
-                <a:cs typeface="Arial"/>
-              </a:rPr>
-              <a:t> purposes </a:t>
-            </a:r>
-            <a:r>
-              <a:rPr sz="2750" dirty="0">
-                <a:latin typeface="Arial"/>
-                <a:cs typeface="Arial"/>
-              </a:rPr>
-              <a:t>for</a:t>
-            </a:r>
-            <a:r>
-              <a:rPr sz="2750" spc="-75" dirty="0">
-                <a:latin typeface="Arial"/>
-                <a:cs typeface="Arial"/>
-              </a:rPr>
-              <a:t> </a:t>
-            </a:r>
-            <a:r>
-              <a:rPr sz="2750" spc="-470" dirty="0">
-                <a:latin typeface="Arial"/>
-                <a:cs typeface="Arial"/>
-              </a:rPr>
-              <a:t>SEO</a:t>
-            </a:r>
-            <a:endParaRPr sz="2750" dirty="0">
-              <a:latin typeface="Arial"/>
-              <a:cs typeface="Arial"/>
-            </a:endParaRPr>
-          </a:p>
-          <a:p>
-            <a:pPr marL="241300" marR="279400" indent="-229235">
-              <a:lnSpc>
-                <a:spcPct val="92200"/>
-              </a:lnSpc>
-              <a:spcBef>
-                <a:spcPts val="940"/>
-              </a:spcBef>
-              <a:buChar char="•"/>
-              <a:tabLst>
-                <a:tab pos="241300" algn="l"/>
-                <a:tab pos="321945" algn="l"/>
-              </a:tabLst>
+              <a:rPr lang="en-US" sz="2541">
+                <a:solidFill>
+                  <a:srgbClr val="404040"/>
+                </a:solidFill>
+                <a:latin typeface="Trebuchet MS"/>
+              </a:rPr>
+              <a:t>W3C HTML Validation Tool</a:t>
+            </a:r>
+          </a:p>
+          <a:p>
+            <a:pPr marL="672227" indent="-257272">
+              <a:buFont typeface="Wingdings"/>
+              <a:buChar char="§"/>
             </a:pPr>
             <a:r>
-              <a:rPr sz="2750" dirty="0">
-                <a:latin typeface="Arial"/>
-                <a:cs typeface="Arial"/>
-              </a:rPr>
-              <a:t>	If</a:t>
-            </a:r>
-            <a:r>
-              <a:rPr sz="2750" spc="-100" dirty="0">
-                <a:latin typeface="Arial"/>
-                <a:cs typeface="Arial"/>
-              </a:rPr>
-              <a:t> </a:t>
-            </a:r>
-            <a:r>
-              <a:rPr sz="2750" spc="-135" dirty="0">
-                <a:latin typeface="Arial"/>
-                <a:cs typeface="Arial"/>
-              </a:rPr>
-              <a:t>an</a:t>
-            </a:r>
-            <a:r>
-              <a:rPr sz="2750" spc="-110" dirty="0">
-                <a:latin typeface="Arial"/>
-                <a:cs typeface="Arial"/>
-              </a:rPr>
-              <a:t> </a:t>
-            </a:r>
-            <a:r>
-              <a:rPr sz="2750" spc="-140" dirty="0">
-                <a:latin typeface="Arial"/>
-                <a:cs typeface="Arial"/>
-              </a:rPr>
-              <a:t>image</a:t>
-            </a:r>
-            <a:r>
-              <a:rPr sz="2750" spc="-114" dirty="0">
-                <a:latin typeface="Arial"/>
-                <a:cs typeface="Arial"/>
-              </a:rPr>
-              <a:t> </a:t>
-            </a:r>
-            <a:r>
-              <a:rPr sz="2750" spc="-85" dirty="0">
-                <a:latin typeface="Arial"/>
-                <a:cs typeface="Arial"/>
-              </a:rPr>
-              <a:t>fails</a:t>
-            </a:r>
-            <a:r>
-              <a:rPr sz="2750" spc="-40" dirty="0">
-                <a:latin typeface="Arial"/>
-                <a:cs typeface="Arial"/>
-              </a:rPr>
-              <a:t> </a:t>
-            </a:r>
-            <a:r>
-              <a:rPr sz="2750" spc="-25" dirty="0">
-                <a:latin typeface="Arial"/>
-                <a:cs typeface="Arial"/>
-              </a:rPr>
-              <a:t>to </a:t>
-            </a:r>
-            <a:r>
-              <a:rPr sz="2750" spc="-70" dirty="0">
-                <a:latin typeface="Arial"/>
-                <a:cs typeface="Arial"/>
-              </a:rPr>
-              <a:t>load,</a:t>
-            </a:r>
-            <a:r>
-              <a:rPr sz="2750" spc="-105" dirty="0">
-                <a:latin typeface="Arial"/>
-                <a:cs typeface="Arial"/>
-              </a:rPr>
-              <a:t> </a:t>
-            </a:r>
-            <a:r>
-              <a:rPr sz="2750" dirty="0">
-                <a:latin typeface="Arial"/>
-                <a:cs typeface="Arial"/>
-              </a:rPr>
-              <a:t>the</a:t>
-            </a:r>
-            <a:r>
-              <a:rPr sz="2750" spc="-120" dirty="0">
-                <a:latin typeface="Arial"/>
-                <a:cs typeface="Arial"/>
-              </a:rPr>
-              <a:t> </a:t>
-            </a:r>
-            <a:r>
-              <a:rPr sz="2750" dirty="0">
-                <a:latin typeface="Arial"/>
-                <a:cs typeface="Arial"/>
-              </a:rPr>
-              <a:t>alt</a:t>
-            </a:r>
-            <a:r>
-              <a:rPr sz="2750" spc="-114" dirty="0">
-                <a:latin typeface="Arial"/>
-                <a:cs typeface="Arial"/>
-              </a:rPr>
-              <a:t> </a:t>
-            </a:r>
-            <a:r>
-              <a:rPr sz="2750" spc="-10" dirty="0">
-                <a:latin typeface="Arial"/>
-                <a:cs typeface="Arial"/>
-              </a:rPr>
-              <a:t>text</a:t>
-            </a:r>
-            <a:r>
-              <a:rPr sz="2750" spc="-125" dirty="0">
-                <a:latin typeface="Arial"/>
-                <a:cs typeface="Arial"/>
-              </a:rPr>
-              <a:t> </a:t>
-            </a:r>
-            <a:r>
-              <a:rPr sz="2750" spc="-135" dirty="0">
-                <a:latin typeface="Arial"/>
-                <a:cs typeface="Arial"/>
-              </a:rPr>
-              <a:t>appears</a:t>
-            </a:r>
-            <a:r>
-              <a:rPr sz="2750" spc="-120" dirty="0">
-                <a:latin typeface="Arial"/>
-                <a:cs typeface="Arial"/>
-              </a:rPr>
-              <a:t> </a:t>
-            </a:r>
-            <a:r>
-              <a:rPr sz="2750" dirty="0">
-                <a:latin typeface="Arial"/>
-                <a:cs typeface="Arial"/>
-              </a:rPr>
-              <a:t>in</a:t>
-            </a:r>
-            <a:r>
-              <a:rPr sz="2750" spc="-125" dirty="0">
-                <a:latin typeface="Arial"/>
-                <a:cs typeface="Arial"/>
-              </a:rPr>
-              <a:t> place</a:t>
-            </a:r>
-            <a:r>
-              <a:rPr sz="2750" spc="-120" dirty="0">
-                <a:latin typeface="Arial"/>
-                <a:cs typeface="Arial"/>
-              </a:rPr>
-              <a:t> </a:t>
-            </a:r>
-            <a:r>
-              <a:rPr sz="2750" dirty="0">
-                <a:latin typeface="Arial"/>
-                <a:cs typeface="Arial"/>
-              </a:rPr>
-              <a:t>of</a:t>
-            </a:r>
-            <a:r>
-              <a:rPr sz="2750" spc="-180" dirty="0">
-                <a:latin typeface="Arial"/>
-                <a:cs typeface="Arial"/>
-              </a:rPr>
-              <a:t> </a:t>
-            </a:r>
-            <a:r>
-              <a:rPr sz="2750" dirty="0">
-                <a:latin typeface="Arial"/>
-                <a:cs typeface="Arial"/>
-              </a:rPr>
-              <a:t>the</a:t>
-            </a:r>
-            <a:r>
-              <a:rPr sz="2750" spc="-120" dirty="0">
-                <a:latin typeface="Arial"/>
-                <a:cs typeface="Arial"/>
-              </a:rPr>
-              <a:t> </a:t>
-            </a:r>
-            <a:r>
-              <a:rPr sz="2750" spc="-140" dirty="0">
-                <a:latin typeface="Arial"/>
-                <a:cs typeface="Arial"/>
-              </a:rPr>
-              <a:t>image,</a:t>
-            </a:r>
-            <a:r>
-              <a:rPr sz="2750" spc="-100" dirty="0">
-                <a:latin typeface="Arial"/>
-                <a:cs typeface="Arial"/>
-              </a:rPr>
-              <a:t> </a:t>
-            </a:r>
-            <a:r>
-              <a:rPr sz="2750" spc="-60" dirty="0">
-                <a:latin typeface="Arial"/>
-                <a:cs typeface="Arial"/>
-              </a:rPr>
-              <a:t>providing</a:t>
-            </a:r>
-            <a:r>
-              <a:rPr sz="2750" spc="-120" dirty="0">
-                <a:latin typeface="Arial"/>
-                <a:cs typeface="Arial"/>
-              </a:rPr>
-              <a:t> </a:t>
-            </a:r>
-            <a:r>
-              <a:rPr sz="2750" spc="-65" dirty="0">
-                <a:latin typeface="Arial"/>
-                <a:cs typeface="Arial"/>
-              </a:rPr>
-              <a:t>context</a:t>
-            </a:r>
-            <a:r>
-              <a:rPr sz="2750" spc="-114" dirty="0">
-                <a:latin typeface="Arial"/>
-                <a:cs typeface="Arial"/>
-              </a:rPr>
-              <a:t> </a:t>
-            </a:r>
-            <a:r>
-              <a:rPr sz="2750" spc="-25" dirty="0">
-                <a:latin typeface="Arial"/>
-                <a:cs typeface="Arial"/>
-              </a:rPr>
-              <a:t>so </a:t>
-            </a:r>
-            <a:r>
-              <a:rPr sz="2750" spc="-165" dirty="0">
-                <a:latin typeface="Arial"/>
-                <a:cs typeface="Arial"/>
-              </a:rPr>
-              <a:t>users</a:t>
-            </a:r>
-            <a:r>
-              <a:rPr sz="2750" spc="-90" dirty="0">
-                <a:latin typeface="Arial"/>
-                <a:cs typeface="Arial"/>
-              </a:rPr>
-              <a:t> </a:t>
-            </a:r>
-            <a:r>
-              <a:rPr sz="2750" spc="-20" dirty="0">
-                <a:latin typeface="Arial"/>
-                <a:cs typeface="Arial"/>
-              </a:rPr>
-              <a:t>aren’t</a:t>
-            </a:r>
-            <a:r>
-              <a:rPr sz="2750" spc="-85" dirty="0">
-                <a:latin typeface="Arial"/>
-                <a:cs typeface="Arial"/>
-              </a:rPr>
-              <a:t> </a:t>
-            </a:r>
-            <a:r>
-              <a:rPr sz="2750" dirty="0">
-                <a:latin typeface="Arial"/>
-                <a:cs typeface="Arial"/>
-              </a:rPr>
-              <a:t>left</a:t>
-            </a:r>
-            <a:r>
-              <a:rPr sz="2750" spc="-80" dirty="0">
-                <a:latin typeface="Arial"/>
-                <a:cs typeface="Arial"/>
-              </a:rPr>
-              <a:t> </a:t>
-            </a:r>
-            <a:r>
-              <a:rPr sz="2750" spc="-35" dirty="0">
-                <a:latin typeface="Arial"/>
-                <a:cs typeface="Arial"/>
-              </a:rPr>
-              <a:t>guessing.</a:t>
-            </a:r>
-            <a:endParaRPr sz="2750" dirty="0">
-              <a:latin typeface="Arial"/>
-              <a:cs typeface="Arial"/>
-            </a:endParaRPr>
+              <a:rPr lang="en-US" sz="1815">
+                <a:solidFill>
+                  <a:srgbClr val="404040"/>
+                </a:solidFill>
+                <a:latin typeface="Trebuchet MS"/>
+                <a:hlinkClick r:id="rId2"/>
+              </a:rPr>
+              <a:t>http://validator.w3.org</a:t>
+            </a:r>
           </a:p>
         </p:txBody>
       </p:sp>
     </p:spTree>
+    <p:extLst>
+      <p:ext uri="{BB962C8B-B14F-4D97-AF65-F5344CB8AC3E}">
+        <p14:creationId xmlns:p14="http://schemas.microsoft.com/office/powerpoint/2010/main" val="900791299"/>
+      </p:ext>
+    </p:extLst>
   </p:cSld>
   <p:clrMapOvr>
     <a:masterClrMapping/>
@@ -5911,219 +5912,6 @@
           <p:cNvPr id="2" name="Title 1">
             <a:extLst>
               <a:ext uri="{FF2B5EF4-FFF2-40B4-BE49-F238E27FC236}">
-                <a16:creationId xmlns:a16="http://schemas.microsoft.com/office/drawing/2014/main" id="{F65E3CAD-1F92-FAC1-1A69-BB5F8694FC18}"/>
-              </a:ext>
-            </a:extLst>
-          </p:cNvPr>
-          <p:cNvSpPr>
-            <a:spLocks noGrp="1"/>
-          </p:cNvSpPr>
-          <p:nvPr>
-            <p:ph type="title"/>
-          </p:nvPr>
-        </p:nvSpPr>
-        <p:spPr>
-          <a:xfrm>
-            <a:off x="1936002" y="537242"/>
-            <a:ext cx="6500116" cy="572620"/>
-          </a:xfrm>
-        </p:spPr>
-        <p:txBody>
-          <a:bodyPr>
-            <a:normAutofit fontScale="90000"/>
-          </a:bodyPr>
-          <a:lstStyle/>
-          <a:p>
-            <a:r>
-              <a:rPr lang="en-DK"/>
-              <a:t>Validering</a:t>
-            </a:r>
-          </a:p>
-        </p:txBody>
-      </p:sp>
-      <p:sp>
-        <p:nvSpPr>
-          <p:cNvPr id="3" name="TextBox 2">
-            <a:extLst>
-              <a:ext uri="{FF2B5EF4-FFF2-40B4-BE49-F238E27FC236}">
-                <a16:creationId xmlns:a16="http://schemas.microsoft.com/office/drawing/2014/main" id="{F57C6769-851B-1D3A-3054-4D1713D7384A}"/>
-              </a:ext>
-            </a:extLst>
-          </p:cNvPr>
-          <p:cNvSpPr txBox="1"/>
-          <p:nvPr/>
-        </p:nvSpPr>
-        <p:spPr>
-          <a:xfrm>
-            <a:off x="2551043" y="1714785"/>
-            <a:ext cx="4928804" cy="3128222"/>
-          </a:xfrm>
-          <a:prstGeom prst="rect">
-            <a:avLst/>
-          </a:prstGeom>
-          <a:noFill/>
-        </p:spPr>
-        <p:txBody>
-          <a:bodyPr rot="0" spcFirstLastPara="0" vertOverflow="overflow" horzOverflow="overflow" vert="horz" wrap="square" lIns="82988" tIns="41494" rIns="82988" bIns="41494" numCol="1" spcCol="0" rtlCol="0" fromWordArt="0" anchor="t" anchorCtr="0" forceAA="0" compatLnSpc="1">
-            <a:prstTxWarp prst="textNoShape">
-              <a:avLst/>
-            </a:prstTxWarp>
-            <a:spAutoFit/>
-          </a:bodyPr>
-          <a:lstStyle/>
-          <a:p>
-            <a:pPr marL="315366" indent="-315366">
-              <a:buFont typeface="Wingdings"/>
-              <a:buChar char="§"/>
-            </a:pPr>
-            <a:r>
-              <a:rPr lang="en-US" sz="2541">
-                <a:solidFill>
-                  <a:srgbClr val="404040"/>
-                </a:solidFill>
-                <a:latin typeface="Trebuchet MS"/>
-              </a:rPr>
-              <a:t>Check your code for syntax errors</a:t>
-            </a:r>
-          </a:p>
-          <a:p>
-            <a:pPr marL="672227" indent="-257272">
-              <a:buFont typeface="Wingdings"/>
-              <a:buChar char="§"/>
-            </a:pPr>
-            <a:r>
-              <a:rPr lang="en-US" sz="2178">
-                <a:solidFill>
-                  <a:srgbClr val="404040"/>
-                </a:solidFill>
-                <a:latin typeface="Trebuchet MS"/>
-              </a:rPr>
-              <a:t>Benefit:</a:t>
-            </a:r>
-          </a:p>
-          <a:p>
-            <a:pPr marL="1037387" indent="-207477">
-              <a:buFont typeface="Wingdings"/>
-              <a:buChar char="§"/>
-            </a:pPr>
-            <a:r>
-              <a:rPr lang="en-US" sz="2178">
-                <a:solidFill>
-                  <a:srgbClr val="404040"/>
-                </a:solidFill>
-                <a:latin typeface="Trebuchet MS"/>
-              </a:rPr>
-              <a:t>Valid code </a:t>
-            </a:r>
-            <a:r>
-              <a:rPr lang="en-US" sz="2178">
-                <a:solidFill>
-                  <a:srgbClr val="404040"/>
-                </a:solidFill>
-                <a:latin typeface="Trebuchet MS"/>
-                <a:sym typeface="Wingdings"/>
-              </a:rPr>
-              <a:t></a:t>
-            </a:r>
-            <a:r>
-              <a:rPr lang="en-US" sz="2178">
-                <a:solidFill>
-                  <a:srgbClr val="404040"/>
-                </a:solidFill>
-                <a:latin typeface="Trebuchet MS"/>
-              </a:rPr>
-              <a:t> </a:t>
-            </a:r>
-            <a:br>
-              <a:rPr lang="en-US" sz="2178">
-                <a:solidFill>
-                  <a:srgbClr val="404040"/>
-                </a:solidFill>
-                <a:latin typeface="Trebuchet MS"/>
-              </a:rPr>
-            </a:br>
-            <a:r>
-              <a:rPr lang="en-US" sz="2178">
-                <a:solidFill>
-                  <a:srgbClr val="404040"/>
-                </a:solidFill>
-                <a:latin typeface="Trebuchet MS"/>
-              </a:rPr>
-              <a:t>more consistent browser display</a:t>
-            </a:r>
-          </a:p>
-          <a:p>
-            <a:pPr marL="1037387" indent="-207477"/>
-            <a:endParaRPr lang="LID4096" sz="1634"/>
-          </a:p>
-          <a:p>
-            <a:pPr marL="315366" indent="-315366">
-              <a:buFont typeface="Wingdings"/>
-              <a:buChar char="§"/>
-            </a:pPr>
-            <a:r>
-              <a:rPr lang="en-US" sz="2541">
-                <a:solidFill>
-                  <a:srgbClr val="404040"/>
-                </a:solidFill>
-                <a:latin typeface="Trebuchet MS"/>
-              </a:rPr>
-              <a:t>W3C HTML Validation Tool</a:t>
-            </a:r>
-          </a:p>
-          <a:p>
-            <a:pPr marL="672227" indent="-257272">
-              <a:buFont typeface="Wingdings"/>
-              <a:buChar char="§"/>
-            </a:pPr>
-            <a:r>
-              <a:rPr lang="en-US" sz="1815">
-                <a:solidFill>
-                  <a:srgbClr val="404040"/>
-                </a:solidFill>
-                <a:latin typeface="Trebuchet MS"/>
-                <a:hlinkClick r:id="rId2"/>
-              </a:rPr>
-              <a:t>http://validator.w3.org</a:t>
-            </a:r>
-          </a:p>
-        </p:txBody>
-      </p:sp>
-    </p:spTree>
-    <p:extLst>
-      <p:ext uri="{BB962C8B-B14F-4D97-AF65-F5344CB8AC3E}">
-        <p14:creationId xmlns:p14="http://schemas.microsoft.com/office/powerpoint/2010/main" val="900791299"/>
-      </p:ext>
-    </p:extLst>
-  </p:cSld>
-  <p:clrMapOvr>
-    <a:masterClrMapping/>
-  </p:clrMapOvr>
-</p:sld>
-</file>
-
-<file path=ppt/slides/slide14.xml><?xml version="1.0" encoding="utf-8"?>
-<p:sld xmlns:a="http://schemas.openxmlformats.org/drawingml/2006/main" xmlns:r="http://schemas.openxmlformats.org/officeDocument/2006/relationships" xmlns:p="http://schemas.openxmlformats.org/presentationml/2006/main">
-  <p:cSld>
-    <p:spTree>
-      <p:nvGrpSpPr>
-        <p:cNvPr id="1" name=""/>
-        <p:cNvGrpSpPr/>
-        <p:nvPr/>
-      </p:nvGrpSpPr>
-      <p:grpSpPr>
-        <a:xfrm>
-          <a:off x="0" y="0"/>
-          <a:ext cx="0" cy="0"/>
-          <a:chOff x="0" y="0"/>
-          <a:chExt cx="0" cy="0"/>
-        </a:xfrm>
-      </p:grpSpPr>
-      <p:sp>
-        <p:nvSpPr>
-          <p:cNvPr id="2" name="Title 1">
-            <a:extLst>
-              <a:ext uri="{FF2B5EF4-FFF2-40B4-BE49-F238E27FC236}">
                 <a16:creationId xmlns:a16="http://schemas.microsoft.com/office/drawing/2014/main" id="{C3C1381E-143D-70B1-62ED-C95EA5394C40}"/>
               </a:ext>
             </a:extLst>
@@ -6188,7 +5976,7 @@
 </p:sld>
 </file>
 
-<file path=ppt/slides/slide15.xml><?xml version="1.0" encoding="utf-8"?>
+<file path=ppt/slides/slide14.xml><?xml version="1.0" encoding="utf-8"?>
 <p:sld xmlns:a="http://schemas.openxmlformats.org/drawingml/2006/main" xmlns:r="http://schemas.openxmlformats.org/officeDocument/2006/relationships" xmlns:p="http://schemas.openxmlformats.org/presentationml/2006/main">
   <p:cSld>
     <p:spTree>
@@ -7387,7 +7175,7 @@
           <p:cNvPr id="2" name="Title 1">
             <a:extLst>
               <a:ext uri="{FF2B5EF4-FFF2-40B4-BE49-F238E27FC236}">
-                <a16:creationId xmlns:a16="http://schemas.microsoft.com/office/drawing/2014/main" id="{DC59BD7F-825E-8CB3-008D-EDD80DDC289D}"/>
+                <a16:creationId xmlns:a16="http://schemas.microsoft.com/office/drawing/2014/main" id="{3CF527CA-5FA5-C8F9-21CC-3C3D66D4A890}"/>
               </a:ext>
             </a:extLst>
           </p:cNvPr>
@@ -7401,74 +7189,136 @@
         <p:spPr>
           <a:xfrm>
             <a:off x="1936002" y="537242"/>
-            <a:ext cx="6500116" cy="572620"/>
+            <a:ext cx="6500116" cy="387798"/>
           </a:xfrm>
         </p:spPr>
         <p:txBody>
-          <a:bodyPr>
-            <a:normAutofit fontScale="90000"/>
+          <a:bodyPr vert="horz" wrap="square" lIns="0" tIns="0" rIns="0" bIns="0" rtlCol="0" anchor="t">
+            <a:spAutoFit/>
           </a:bodyPr>
           <a:lstStyle/>
           <a:p>
             <a:r>
-              <a:rPr lang="en-GB"/>
-              <a:t>Pixel vs. Vector Graphics</a:t>
-            </a:r>
-            <a:endParaRPr lang="en-DK"/>
-          </a:p>
-        </p:txBody>
-      </p:sp>
-      <p:pic>
-        <p:nvPicPr>
-          <p:cNvPr id="1026" name="Picture 2" descr="Vector vs. Raster Graphics • Printing Partners">
+              <a:rPr lang="en-GB" dirty="0">
+                <a:solidFill>
+                  <a:schemeClr val="tx1"/>
+                </a:solidFill>
+              </a:rPr>
+              <a:t>N</a:t>
+            </a:r>
+            <a:r>
+              <a:rPr lang="en-DK" dirty="0">
+                <a:solidFill>
+                  <a:schemeClr val="tx1"/>
+                </a:solidFill>
+              </a:rPr>
+              <a:t>ew image formats</a:t>
+            </a:r>
+            <a:endParaRPr lang="en-US" dirty="0">
+              <a:solidFill>
+                <a:schemeClr val="tx1"/>
+              </a:solidFill>
+            </a:endParaRPr>
+          </a:p>
+        </p:txBody>
+      </p:sp>
+      <p:sp>
+        <p:nvSpPr>
+          <p:cNvPr id="3" name="Text Placeholder 2">
             <a:extLst>
               <a:ext uri="{FF2B5EF4-FFF2-40B4-BE49-F238E27FC236}">
-                <a16:creationId xmlns:a16="http://schemas.microsoft.com/office/drawing/2014/main" id="{22904DE9-FD6A-7B1C-6935-E9C62E1108C0}"/>
+                <a16:creationId xmlns:a16="http://schemas.microsoft.com/office/drawing/2014/main" id="{23E6877E-19CE-4AC4-1B42-B3663D8202AF}"/>
               </a:ext>
             </a:extLst>
           </p:cNvPr>
-          <p:cNvPicPr>
-            <a:picLocks noChangeAspect="1" noChangeArrowheads="1"/>
-          </p:cNvPicPr>
-          <p:nvPr/>
-        </p:nvPicPr>
-        <p:blipFill>
-          <a:blip r:embed="rId2">
-            <a:extLst>
-              <a:ext uri="{28A0092B-C50C-407E-A947-70E740481C1C}">
-                <a14:useLocalDpi xmlns:a14="http://schemas.microsoft.com/office/drawing/2010/main" val="0"/>
-              </a:ext>
-            </a:extLst>
-          </a:blip>
-          <a:srcRect/>
-          <a:stretch>
-            <a:fillRect/>
-          </a:stretch>
-        </p:blipFill>
-        <p:spPr bwMode="auto">
+          <p:cNvSpPr>
+            <a:spLocks noGrp="1"/>
+          </p:cNvSpPr>
+          <p:nvPr>
+            <p:ph type="body" idx="1"/>
+          </p:nvPr>
+        </p:nvSpPr>
+        <p:spPr>
           <a:xfrm>
-            <a:off x="1936002" y="1672592"/>
-            <a:ext cx="8033657" cy="3748484"/>
+            <a:off x="1728780" y="1577341"/>
+            <a:ext cx="8734441" cy="1256970"/>
           </a:xfrm>
-          <a:prstGeom prst="rect">
-            <a:avLst/>
-          </a:prstGeom>
-          <a:noFill/>
-          <a:extLst>
-            <a:ext uri="{909E8E84-426E-40DD-AFC4-6F175D3DCCD1}">
-              <a14:hiddenFill xmlns:a14="http://schemas.microsoft.com/office/drawing/2010/main">
-                <a:solidFill>
-                  <a:srgbClr val="FFFFFF"/>
-                </a:solidFill>
-              </a14:hiddenFill>
-            </a:ext>
-          </a:extLst>
         </p:spPr>
-      </p:pic>
+        <p:txBody>
+          <a:bodyPr>
+            <a:normAutofit fontScale="85000" lnSpcReduction="20000"/>
+          </a:bodyPr>
+          <a:lstStyle/>
+          <a:p>
+            <a:r>
+              <a:rPr lang="en-GB" b="1" dirty="0" err="1"/>
+              <a:t>WebP</a:t>
+            </a:r>
+            <a:r>
+              <a:rPr lang="en-GB" b="1" dirty="0"/>
+              <a:t> Image Format</a:t>
+            </a:r>
+          </a:p>
+          <a:p>
+            <a:r>
+              <a:rPr lang="en-GB" b="1" dirty="0"/>
+              <a:t>File extension:</a:t>
+            </a:r>
+            <a:r>
+              <a:rPr lang="en-GB" dirty="0"/>
+              <a:t> .</a:t>
+            </a:r>
+            <a:r>
+              <a:rPr lang="en-GB" dirty="0" err="1"/>
+              <a:t>webp</a:t>
+            </a:r>
+            <a:endParaRPr lang="en-GB" dirty="0"/>
+          </a:p>
+          <a:p>
+            <a:r>
+              <a:rPr lang="en-GB" b="1" dirty="0"/>
+              <a:t>Developed by:</a:t>
+            </a:r>
+            <a:r>
+              <a:rPr lang="en-GB" dirty="0"/>
+              <a:t> Google</a:t>
+            </a:r>
+          </a:p>
+          <a:p>
+            <a:r>
+              <a:rPr lang="en-GB" b="1" dirty="0"/>
+              <a:t>Purpose:</a:t>
+            </a:r>
+            <a:r>
+              <a:rPr lang="en-GB" dirty="0"/>
+              <a:t> Provide </a:t>
+            </a:r>
+            <a:r>
+              <a:rPr lang="en-GB" b="1" dirty="0"/>
+              <a:t>smaller image file sizes</a:t>
+            </a:r>
+            <a:r>
+              <a:rPr lang="en-GB" dirty="0"/>
+              <a:t> with </a:t>
+            </a:r>
+            <a:r>
+              <a:rPr lang="en-GB" b="1" dirty="0"/>
+              <a:t>high quality</a:t>
+            </a:r>
+            <a:r>
+              <a:rPr lang="en-GB" dirty="0"/>
+              <a:t>, to make websites faster.</a:t>
+            </a:r>
+          </a:p>
+          <a:p>
+            <a:endParaRPr lang="en-DK" dirty="0"/>
+          </a:p>
+        </p:txBody>
+      </p:sp>
     </p:spTree>
     <p:extLst>
       <p:ext uri="{BB962C8B-B14F-4D97-AF65-F5344CB8AC3E}">
-        <p14:creationId xmlns:p14="http://schemas.microsoft.com/office/powerpoint/2010/main" val="3493922603"/>
+        <p14:creationId xmlns:p14="http://schemas.microsoft.com/office/powerpoint/2010/main" val="3557020329"/>
       </p:ext>
     </p:extLst>
   </p:cSld>
@@ -7500,7 +7350,7 @@
           <p:cNvPr id="2" name="Title 1">
             <a:extLst>
               <a:ext uri="{FF2B5EF4-FFF2-40B4-BE49-F238E27FC236}">
-                <a16:creationId xmlns:a16="http://schemas.microsoft.com/office/drawing/2014/main" id="{3CF527CA-5FA5-C8F9-21CC-3C3D66D4A890}"/>
+                <a16:creationId xmlns:a16="http://schemas.microsoft.com/office/drawing/2014/main" id="{6DB7E3E0-370E-C532-12B8-2A311248738A}"/>
               </a:ext>
             </a:extLst>
           </p:cNvPr>
@@ -7513,37 +7363,22 @@
         </p:nvSpPr>
         <p:spPr>
           <a:xfrm>
-            <a:off x="1936002" y="537242"/>
-            <a:ext cx="6500116" cy="387798"/>
+            <a:off x="2231136" y="-2927"/>
+            <a:ext cx="7729728" cy="1188720"/>
           </a:xfrm>
         </p:spPr>
         <p:txBody>
-          <a:bodyPr vert="horz" wrap="square" lIns="0" tIns="0" rIns="0" bIns="0" rtlCol="0" anchor="t">
-            <a:spAutoFit/>
-          </a:bodyPr>
-          <a:lstStyle/>
-          <a:p>
-            <a:r>
-              <a:rPr lang="en-GB" dirty="0">
-                <a:solidFill>
-                  <a:schemeClr val="tx1"/>
-                </a:solidFill>
-              </a:rPr>
-              <a:t>N</a:t>
-            </a:r>
-            <a:r>
-              <a:rPr lang="en-DK" dirty="0">
-                <a:solidFill>
-                  <a:schemeClr val="tx1"/>
-                </a:solidFill>
-              </a:rPr>
-              <a:t>ew image formats</a:t>
-            </a:r>
-            <a:endParaRPr lang="en-US" dirty="0">
-              <a:solidFill>
-                <a:schemeClr val="tx1"/>
-              </a:solidFill>
-            </a:endParaRPr>
+          <a:bodyPr/>
+          <a:lstStyle/>
+          <a:p>
+            <a:r>
+              <a:rPr lang="en-GB" b="1"/>
+              <a:t>Title (title tag)</a:t>
+            </a:r>
+            <a:br>
+              <a:rPr lang="en-GB"/>
+            </a:br>
+            <a:endParaRPr lang="en-DK"/>
           </a:p>
         </p:txBody>
       </p:sp>
@@ -7552,7 +7387,7 @@
           <p:cNvPr id="3" name="Text Placeholder 2">
             <a:extLst>
               <a:ext uri="{FF2B5EF4-FFF2-40B4-BE49-F238E27FC236}">
-                <a16:creationId xmlns:a16="http://schemas.microsoft.com/office/drawing/2014/main" id="{23E6877E-19CE-4AC4-1B42-B3663D8202AF}"/>
+                <a16:creationId xmlns:a16="http://schemas.microsoft.com/office/drawing/2014/main" id="{66132838-573F-018D-223F-648CF0C5DE98}"/>
               </a:ext>
             </a:extLst>
           </p:cNvPr>
@@ -7565,85 +7400,40 @@
         </p:nvSpPr>
         <p:spPr>
           <a:xfrm>
-            <a:off x="1728780" y="1577341"/>
-            <a:ext cx="8734441" cy="1256970"/>
+            <a:off x="1084610" y="2389057"/>
+            <a:ext cx="10300970" cy="2400657"/>
           </a:xfrm>
         </p:spPr>
         <p:txBody>
-          <a:bodyPr>
-            <a:normAutofit fontScale="85000" lnSpcReduction="20000"/>
-          </a:bodyPr>
-          <a:lstStyle/>
-          <a:p>
-            <a:r>
-              <a:rPr lang="en-GB" b="1" dirty="0" err="1"/>
-              <a:t>WebP</a:t>
-            </a:r>
-            <a:r>
-              <a:rPr lang="en-GB" b="1" dirty="0"/>
-              <a:t> Image Format</a:t>
-            </a:r>
-          </a:p>
-          <a:p>
-            <a:r>
-              <a:rPr lang="en-GB" b="1" dirty="0"/>
-              <a:t>File extension:</a:t>
-            </a:r>
-            <a:r>
-              <a:rPr lang="en-GB" dirty="0"/>
-              <a:t> .</a:t>
-            </a:r>
-            <a:r>
-              <a:rPr lang="en-GB" dirty="0" err="1"/>
-              <a:t>webp</a:t>
-            </a:r>
-            <a:endParaRPr lang="en-GB" dirty="0"/>
-          </a:p>
-          <a:p>
-            <a:r>
-              <a:rPr lang="en-GB" b="1" dirty="0"/>
-              <a:t>Developed by:</a:t>
-            </a:r>
-            <a:r>
-              <a:rPr lang="en-GB" dirty="0"/>
-              <a:t> Google</a:t>
-            </a:r>
-          </a:p>
-          <a:p>
-            <a:r>
-              <a:rPr lang="en-GB" b="1" dirty="0"/>
-              <a:t>Purpose:</a:t>
-            </a:r>
-            <a:r>
-              <a:rPr lang="en-GB" dirty="0"/>
-              <a:t> Provide </a:t>
-            </a:r>
-            <a:r>
-              <a:rPr lang="en-GB" b="1" dirty="0"/>
-              <a:t>smaller image file sizes</a:t>
-            </a:r>
-            <a:r>
-              <a:rPr lang="en-GB" dirty="0"/>
-              <a:t> with </a:t>
-            </a:r>
-            <a:r>
-              <a:rPr lang="en-GB" b="1" dirty="0"/>
-              <a:t>high quality</a:t>
-            </a:r>
-            <a:r>
-              <a:rPr lang="en-GB" dirty="0"/>
-              <a:t>, to make websites faster.</a:t>
-            </a:r>
-          </a:p>
-          <a:p>
-            <a:endParaRPr lang="en-DK" dirty="0"/>
+          <a:bodyPr/>
+          <a:lstStyle/>
+          <a:p>
+            <a:r>
+              <a:rPr lang="en-GB"/>
+              <a:t>Very important:  </a:t>
+            </a:r>
+          </a:p>
+          <a:p>
+            <a:r>
+              <a:rPr lang="en-GB"/>
+              <a:t>The &lt;title&gt; tag is required in HTML documents!</a:t>
+            </a:r>
+          </a:p>
+          <a:p>
+            <a:r>
+              <a:rPr lang="en-GB"/>
+              <a:t>The contents of a page title is very important for search engine optimization (SEO)! The page title is used by search engine algorithms to decide the order when listing pages in search results.</a:t>
+            </a:r>
+          </a:p>
+          <a:p>
+            <a:endParaRPr lang="en-DK"/>
           </a:p>
         </p:txBody>
       </p:sp>
     </p:spTree>
     <p:extLst>
       <p:ext uri="{BB962C8B-B14F-4D97-AF65-F5344CB8AC3E}">
-        <p14:creationId xmlns:p14="http://schemas.microsoft.com/office/powerpoint/2010/main" val="3557020329"/>
+        <p14:creationId xmlns:p14="http://schemas.microsoft.com/office/powerpoint/2010/main" val="3143709235"/>
       </p:ext>
     </p:extLst>
   </p:cSld>
@@ -7675,7 +7465,7 @@
           <p:cNvPr id="2" name="Title 1">
             <a:extLst>
               <a:ext uri="{FF2B5EF4-FFF2-40B4-BE49-F238E27FC236}">
-                <a16:creationId xmlns:a16="http://schemas.microsoft.com/office/drawing/2014/main" id="{6DB7E3E0-370E-C532-12B8-2A311248738A}"/>
+                <a16:creationId xmlns:a16="http://schemas.microsoft.com/office/drawing/2014/main" id="{5A73AD80-8049-3778-C5C5-3E73AD5E0AE4}"/>
               </a:ext>
             </a:extLst>
           </p:cNvPr>
@@ -7688,22 +7478,20 @@
         </p:nvSpPr>
         <p:spPr>
           <a:xfrm>
-            <a:off x="2231136" y="-2927"/>
-            <a:ext cx="7729728" cy="1188720"/>
+            <a:off x="841057" y="307593"/>
+            <a:ext cx="9158922" cy="677108"/>
           </a:xfrm>
         </p:spPr>
         <p:txBody>
-          <a:bodyPr/>
-          <a:lstStyle/>
-          <a:p>
-            <a:r>
-              <a:rPr lang="en-GB" b="1"/>
-              <a:t>Title (title tag)</a:t>
-            </a:r>
-            <a:br>
-              <a:rPr lang="en-GB"/>
-            </a:br>
-            <a:endParaRPr lang="en-DK"/>
+          <a:bodyPr>
+            <a:normAutofit fontScale="90000"/>
+          </a:bodyPr>
+          <a:lstStyle/>
+          <a:p>
+            <a:r>
+              <a:rPr lang="en-DK"/>
+              <a:t>Meta tags</a:t>
+            </a:r>
           </a:p>
         </p:txBody>
       </p:sp>
@@ -7712,7 +7500,7 @@
           <p:cNvPr id="3" name="Text Placeholder 2">
             <a:extLst>
               <a:ext uri="{FF2B5EF4-FFF2-40B4-BE49-F238E27FC236}">
-                <a16:creationId xmlns:a16="http://schemas.microsoft.com/office/drawing/2014/main" id="{66132838-573F-018D-223F-648CF0C5DE98}"/>
+                <a16:creationId xmlns:a16="http://schemas.microsoft.com/office/drawing/2014/main" id="{2DD04759-4F28-69F5-4496-15B725860287}"/>
               </a:ext>
             </a:extLst>
           </p:cNvPr>
@@ -7725,46 +7513,144 @@
         </p:nvSpPr>
         <p:spPr>
           <a:xfrm>
-            <a:off x="1084610" y="2389057"/>
-            <a:ext cx="10300970" cy="2400657"/>
+            <a:off x="917575" y="1702288"/>
+            <a:ext cx="10300970" cy="400110"/>
           </a:xfrm>
         </p:spPr>
         <p:txBody>
-          <a:bodyPr/>
-          <a:lstStyle/>
-          <a:p>
+          <a:bodyPr vert="horz" lIns="91440" tIns="45720" rIns="91440" bIns="45720" rtlCol="0" anchor="t">
+            <a:normAutofit/>
+          </a:bodyPr>
+          <a:lstStyle/>
+          <a:p>
+            <a:pPr marL="0" indent="0">
+              <a:buNone/>
+            </a:pPr>
             <a:r>
               <a:rPr lang="en-GB"/>
-              <a:t>Very important:  </a:t>
-            </a:r>
-          </a:p>
-          <a:p>
-            <a:r>
-              <a:rPr lang="en-GB"/>
-              <a:t>The &lt;title&gt; tag is required in HTML documents!</a:t>
-            </a:r>
-          </a:p>
-          <a:p>
-            <a:r>
-              <a:rPr lang="en-GB"/>
-              <a:t>The contents of a page title is very important for search engine optimization (SEO)! The page title is used by search engine algorithms to decide the order when listing pages in search results.</a:t>
-            </a:r>
-          </a:p>
-          <a:p>
-            <a:endParaRPr lang="en-DK"/>
+              <a:t>&lt;meta charset="utf-8"&gt;</a:t>
+            </a:r>
+            <a:endParaRPr lang="en-US"/>
+          </a:p>
+        </p:txBody>
+      </p:sp>
+      <p:sp>
+        <p:nvSpPr>
+          <p:cNvPr id="5" name="TextBox 4">
+            <a:extLst>
+              <a:ext uri="{FF2B5EF4-FFF2-40B4-BE49-F238E27FC236}">
+                <a16:creationId xmlns:a16="http://schemas.microsoft.com/office/drawing/2014/main" id="{96699A2E-F991-3737-6C1D-18C5D4BB7E0B}"/>
+              </a:ext>
+            </a:extLst>
+          </p:cNvPr>
+          <p:cNvSpPr txBox="1"/>
+          <p:nvPr/>
+        </p:nvSpPr>
+        <p:spPr>
+          <a:xfrm>
+            <a:off x="3048000" y="2967335"/>
+            <a:ext cx="6096000" cy="3139321"/>
+          </a:xfrm>
+          <a:prstGeom prst="rect">
+            <a:avLst/>
+          </a:prstGeom>
+          <a:noFill/>
+        </p:spPr>
+        <p:txBody>
+          <a:bodyPr wrap="square" lIns="91440" tIns="45720" rIns="91440" bIns="45720" anchor="t">
+            <a:spAutoFit/>
+          </a:bodyPr>
+          <a:lstStyle/>
+          <a:p>
+            <a:pPr>
+              <a:buFont typeface="Arial" panose="020B0604020202020204" pitchFamily="34" charset="0"/>
+              <a:buChar char="•"/>
+            </a:pPr>
+            <a:r>
+              <a:rPr lang="en-GB" dirty="0"/>
+              <a:t>It ensures that text, including special characters (like accents, emojis, or non-Latin scripts), displays correctly in the browser.</a:t>
+            </a:r>
+          </a:p>
+          <a:p>
+            <a:pPr>
+              <a:buFont typeface="Arial" panose="020B0604020202020204" pitchFamily="34" charset="0"/>
+              <a:buChar char="•"/>
+            </a:pPr>
+            <a:endParaRPr lang="en-GB" dirty="0"/>
+          </a:p>
+          <a:p>
+            <a:pPr>
+              <a:buFont typeface="Arial" panose="020B0604020202020204" pitchFamily="34" charset="0"/>
+              <a:buChar char="•"/>
+            </a:pPr>
+            <a:r>
+              <a:rPr lang="en-GB" dirty="0"/>
+              <a:t>Without it, browsers might misinterpret characters  (e.g., </a:t>
+            </a:r>
+            <a:r>
+              <a:rPr lang="en-GB" dirty="0" err="1"/>
+              <a:t>Å</a:t>
+            </a:r>
+            <a:r>
+              <a:rPr lang="en-GB" dirty="0"/>
+              <a:t>. © ).</a:t>
+            </a:r>
+          </a:p>
+          <a:p>
+            <a:pPr>
+              <a:buFont typeface="Arial" panose="020B0604020202020204" pitchFamily="34" charset="0"/>
+              <a:buChar char="•"/>
+            </a:pPr>
+            <a:endParaRPr lang="en-GB" dirty="0"/>
+          </a:p>
+          <a:p>
+            <a:pPr>
+              <a:buFont typeface="Arial" panose="020B0604020202020204" pitchFamily="34" charset="0"/>
+              <a:buChar char="•"/>
+            </a:pPr>
+            <a:endParaRPr lang="en-GB" dirty="0"/>
+          </a:p>
+          <a:p>
+            <a:pPr>
+              <a:buFont typeface="Arial" panose="020B0604020202020204" pitchFamily="34" charset="0"/>
+              <a:buChar char="•"/>
+            </a:pPr>
+            <a:endParaRPr lang="en-GB" dirty="0"/>
+          </a:p>
+          <a:p>
+            <a:pPr>
+              <a:buFont typeface="Arial" panose="020B0604020202020204" pitchFamily="34" charset="0"/>
+              <a:buChar char="•"/>
+            </a:pPr>
+            <a:endParaRPr lang="en-GB" dirty="0"/>
+          </a:p>
+          <a:p>
+            <a:pPr>
+              <a:buFont typeface="Arial" panose="020B0604020202020204" pitchFamily="34" charset="0"/>
+              <a:buChar char="•"/>
+            </a:pPr>
+            <a:endParaRPr lang="en-GB" dirty="0"/>
+          </a:p>
+          <a:p>
+            <a:endParaRPr lang="en-GB" dirty="0"/>
           </a:p>
         </p:txBody>
       </p:sp>
     </p:spTree>
     <p:extLst>
       <p:ext uri="{BB962C8B-B14F-4D97-AF65-F5344CB8AC3E}">
-        <p14:creationId xmlns:p14="http://schemas.microsoft.com/office/powerpoint/2010/main" val="3143709235"/>
+        <p14:creationId xmlns:p14="http://schemas.microsoft.com/office/powerpoint/2010/main" val="3817107581"/>
       </p:ext>
     </p:extLst>
   </p:cSld>
   <p:clrMapOvr>
     <a:masterClrMapping/>
   </p:clrMapOvr>
+  <p:extLst>
+    <p:ext uri="{6950BFC3-D8DA-4A85-94F7-54DA5524770B}">
+      <p188:commentRel xmlns:p188="http://schemas.microsoft.com/office/powerpoint/2018/8/main" r:id="rId3"/>
+    </p:ext>
+  </p:extLst>
 </p:sld>
 </file>
 
@@ -8355,6 +8241,15 @@
 </file>
 
 <file path=customXml/item2.xml><?xml version="1.0" encoding="utf-8"?>
+<?mso-contentType ?>
+<FormTemplates xmlns="http://schemas.microsoft.com/sharepoint/v3/contenttype/forms">
+  <Display>DocumentLibraryForm</Display>
+  <Edit>DocumentLibraryForm</Edit>
+  <New>DocumentLibraryForm</New>
+</FormTemplates>
+</file>
+
+<file path=customXml/item3.xml><?xml version="1.0" encoding="utf-8"?>
 <ct:contentTypeSchema xmlns:ct="http://schemas.microsoft.com/office/2006/metadata/contentType" xmlns:ma="http://schemas.microsoft.com/office/2006/metadata/properties/metaAttributes" ct:_="" ma:_="" ma:contentTypeName="Document" ma:contentTypeID="0x0101008FEB4FDFDDEF084D824E2343C1FDD94C" ma:contentTypeVersion="12" ma:contentTypeDescription="Create a new document." ma:contentTypeScope="" ma:versionID="c61ce0d62721950094d3f1e82d2b003d">
   <xsd:schema xmlns:xsd="http://www.w3.org/2001/XMLSchema" xmlns:xs="http://www.w3.org/2001/XMLSchema" xmlns:p="http://schemas.microsoft.com/office/2006/metadata/properties" xmlns:ns2="e849f5a5-735c-42fe-b98c-e71ffb699442" xmlns:ns3="92085a0b-995c-4352-a904-96fa709bce5d" targetNamespace="http://schemas.microsoft.com/office/2006/metadata/properties" ma:root="true" ma:fieldsID="6ecf9a8dd387c710eaa4bd46aa8c1577" ns2:_="" ns3:_="">
     <xsd:import namespace="e849f5a5-735c-42fe-b98c-e71ffb699442"/>
@@ -8555,15 +8450,6 @@
 </ct:contentTypeSchema>
 </file>
 
-<file path=customXml/item3.xml><?xml version="1.0" encoding="utf-8"?>
-<?mso-contentType ?>
-<FormTemplates xmlns="http://schemas.microsoft.com/sharepoint/v3/contenttype/forms">
-  <Display>DocumentLibraryForm</Display>
-  <Edit>DocumentLibraryForm</Edit>
-  <New>DocumentLibraryForm</New>
-</FormTemplates>
-</file>
-
 <file path=customXml/itemProps1.xml><?xml version="1.0" encoding="utf-8"?>
 <ds:datastoreItem xmlns:ds="http://schemas.openxmlformats.org/officeDocument/2006/customXml" ds:itemID="{487F13CA-5568-495C-B874-4AE9D187D7B2}">
   <ds:schemaRefs>
@@ -8576,6 +8462,14 @@
 </file>
 
 <file path=customXml/itemProps2.xml><?xml version="1.0" encoding="utf-8"?>
+<ds:datastoreItem xmlns:ds="http://schemas.openxmlformats.org/officeDocument/2006/customXml" ds:itemID="{DB1F1D0A-E068-4053-891F-90139FC88439}">
+  <ds:schemaRefs>
+    <ds:schemaRef ds:uri="http://schemas.microsoft.com/sharepoint/v3/contenttype/forms"/>
+  </ds:schemaRefs>
+</ds:datastoreItem>
+</file>
+
+<file path=customXml/itemProps3.xml><?xml version="1.0" encoding="utf-8"?>
 <ds:datastoreItem xmlns:ds="http://schemas.openxmlformats.org/officeDocument/2006/customXml" ds:itemID="{463D11BC-38B6-420C-BF6D-921192027A32}">
   <ds:schemaRefs>
     <ds:schemaRef ds:uri="http://schemas.microsoft.com/office/2006/metadata/contentType"/>
@@ -8592,12 +8486,4 @@
     <ds:schemaRef ds:uri="http://schemas.microsoft.com/internal/obd"/>
   </ds:schemaRefs>
 </ds:datastoreItem>
-</file>
-
-<file path=customXml/itemProps3.xml><?xml version="1.0" encoding="utf-8"?>
-<ds:datastoreItem xmlns:ds="http://schemas.openxmlformats.org/officeDocument/2006/customXml" ds:itemID="{DB1F1D0A-E068-4053-891F-90139FC88439}">
-  <ds:schemaRefs>
-    <ds:schemaRef ds:uri="http://schemas.microsoft.com/sharepoint/v3/contenttype/forms"/>
-  </ds:schemaRefs>
-</ds:datastoreItem>
 </file>